--- a/deep_learning/3_RNN_NLP/3_LSTM_GRU/1_RNNdisadvantages_and_LSTM_need.pptx
+++ b/deep_learning/3_RNN_NLP/3_LSTM_GRU/1_RNNdisadvantages_and_LSTM_need.pptx
@@ -224,7 +224,7 @@
           <a:p>
             <a:fld id="{7BAEECA8-D063-486F-AE31-5020270C1449}" type="datetimeFigureOut">
               <a:rPr lang="en-US" smtClean="0"/>
-              <a:t>4/9/2026</a:t>
+              <a:t>4/25/2026</a:t>
             </a:fld>
             <a:endParaRPr lang="en-US"/>
           </a:p>
@@ -401,7 +401,7 @@
           <a:p>
             <a:fld id="{CB233BD1-3BA8-448D-9D08-7846095EA517}" type="datetimeFigureOut">
               <a:rPr lang="en-US" smtClean="0"/>
-              <a:t>4/9/2026</a:t>
+              <a:t>4/25/2026</a:t>
             </a:fld>
             <a:endParaRPr lang="en-US"/>
           </a:p>
@@ -1007,7 +1007,7 @@
           <a:p>
             <a:fld id="{6383FAE1-13DE-4511-8C1B-C8AFB720664C}" type="datetimeFigureOut">
               <a:rPr lang="en-US" smtClean="0"/>
-              <a:t>4/9/2026</a:t>
+              <a:t>4/25/2026</a:t>
             </a:fld>
             <a:endParaRPr lang="en-US"/>
           </a:p>
@@ -1205,7 +1205,7 @@
           <a:p>
             <a:fld id="{6383FAE1-13DE-4511-8C1B-C8AFB720664C}" type="datetimeFigureOut">
               <a:rPr lang="en-US" smtClean="0"/>
-              <a:t>4/9/2026</a:t>
+              <a:t>4/25/2026</a:t>
             </a:fld>
             <a:endParaRPr lang="en-US"/>
           </a:p>
@@ -1413,7 +1413,7 @@
           <a:p>
             <a:fld id="{6383FAE1-13DE-4511-8C1B-C8AFB720664C}" type="datetimeFigureOut">
               <a:rPr lang="en-US" smtClean="0"/>
-              <a:t>4/9/2026</a:t>
+              <a:t>4/25/2026</a:t>
             </a:fld>
             <a:endParaRPr lang="en-US"/>
           </a:p>
@@ -1611,7 +1611,7 @@
           <a:p>
             <a:fld id="{6383FAE1-13DE-4511-8C1B-C8AFB720664C}" type="datetimeFigureOut">
               <a:rPr lang="en-US" smtClean="0"/>
-              <a:t>4/9/2026</a:t>
+              <a:t>4/25/2026</a:t>
             </a:fld>
             <a:endParaRPr lang="en-US"/>
           </a:p>
@@ -1886,7 +1886,7 @@
           <a:p>
             <a:fld id="{6383FAE1-13DE-4511-8C1B-C8AFB720664C}" type="datetimeFigureOut">
               <a:rPr lang="en-US" smtClean="0"/>
-              <a:t>4/9/2026</a:t>
+              <a:t>4/25/2026</a:t>
             </a:fld>
             <a:endParaRPr lang="en-US"/>
           </a:p>
@@ -2151,7 +2151,7 @@
           <a:p>
             <a:fld id="{6383FAE1-13DE-4511-8C1B-C8AFB720664C}" type="datetimeFigureOut">
               <a:rPr lang="en-US" smtClean="0"/>
-              <a:t>4/9/2026</a:t>
+              <a:t>4/25/2026</a:t>
             </a:fld>
             <a:endParaRPr lang="en-US"/>
           </a:p>
@@ -2563,7 +2563,7 @@
           <a:p>
             <a:fld id="{6383FAE1-13DE-4511-8C1B-C8AFB720664C}" type="datetimeFigureOut">
               <a:rPr lang="en-US" smtClean="0"/>
-              <a:t>4/9/2026</a:t>
+              <a:t>4/25/2026</a:t>
             </a:fld>
             <a:endParaRPr lang="en-US"/>
           </a:p>
@@ -2704,7 +2704,7 @@
           <a:p>
             <a:fld id="{6383FAE1-13DE-4511-8C1B-C8AFB720664C}" type="datetimeFigureOut">
               <a:rPr lang="en-US" smtClean="0"/>
-              <a:t>4/9/2026</a:t>
+              <a:t>4/25/2026</a:t>
             </a:fld>
             <a:endParaRPr lang="en-US"/>
           </a:p>
@@ -2817,7 +2817,7 @@
           <a:p>
             <a:fld id="{6383FAE1-13DE-4511-8C1B-C8AFB720664C}" type="datetimeFigureOut">
               <a:rPr lang="en-US" smtClean="0"/>
-              <a:t>4/9/2026</a:t>
+              <a:t>4/25/2026</a:t>
             </a:fld>
             <a:endParaRPr lang="en-US"/>
           </a:p>
@@ -3128,7 +3128,7 @@
           <a:p>
             <a:fld id="{6383FAE1-13DE-4511-8C1B-C8AFB720664C}" type="datetimeFigureOut">
               <a:rPr lang="en-US" smtClean="0"/>
-              <a:t>4/9/2026</a:t>
+              <a:t>4/25/2026</a:t>
             </a:fld>
             <a:endParaRPr lang="en-US"/>
           </a:p>
@@ -3419,7 +3419,7 @@
           <a:p>
             <a:fld id="{6383FAE1-13DE-4511-8C1B-C8AFB720664C}" type="datetimeFigureOut">
               <a:rPr lang="en-US" smtClean="0"/>
-              <a:t>4/9/2026</a:t>
+              <a:t>4/25/2026</a:t>
             </a:fld>
             <a:endParaRPr lang="en-US"/>
           </a:p>
@@ -3663,7 +3663,7 @@
           <a:p>
             <a:fld id="{6383FAE1-13DE-4511-8C1B-C8AFB720664C}" type="datetimeFigureOut">
               <a:rPr lang="en-US" smtClean="0"/>
-              <a:t>4/9/2026</a:t>
+              <a:t>4/25/2026</a:t>
             </a:fld>
             <a:endParaRPr lang="en-US"/>
           </a:p>
@@ -4644,8 +4644,8 @@
           </a:p>
         </p:txBody>
       </p:sp>
-      <mc:AlternateContent xmlns:mc="http://schemas.openxmlformats.org/markup-compatibility/2006">
-        <mc:Choice xmlns:a14="http://schemas.microsoft.com/office/drawing/2010/main" Requires="a14">
+      <mc:AlternateContent xmlns:mc="http://schemas.openxmlformats.org/markup-compatibility/2006" xmlns:a14="http://schemas.microsoft.com/office/drawing/2010/main">
+        <mc:Choice Requires="a14">
           <p:sp>
             <p:nvSpPr>
               <p:cNvPr id="7" name="TextBox 6">
@@ -4824,199 +4824,7 @@
                           </a:solidFill>
                           <a:latin typeface="Cambria Math" panose="02040503050406030204" pitchFamily="18" charset="0"/>
                         </a:rPr>
-                        <m:t>0</m:t>
-                      </m:r>
-                      <m:r>
-                        <a:rPr lang="en-US">
-                          <a:solidFill>
-                            <a:schemeClr val="accent6">
-                              <a:lumMod val="60000"/>
-                              <a:lumOff val="40000"/>
-                            </a:schemeClr>
-                          </a:solidFill>
-                          <a:latin typeface="Cambria Math" panose="02040503050406030204" pitchFamily="18" charset="0"/>
-                        </a:rPr>
-                        <m:t>.</m:t>
-                      </m:r>
-                      <m:r>
-                        <a:rPr lang="en-US">
-                          <a:solidFill>
-                            <a:schemeClr val="accent6">
-                              <a:lumMod val="60000"/>
-                              <a:lumOff val="40000"/>
-                            </a:schemeClr>
-                          </a:solidFill>
-                          <a:latin typeface="Cambria Math" panose="02040503050406030204" pitchFamily="18" charset="0"/>
-                        </a:rPr>
-                        <m:t>5</m:t>
-                      </m:r>
-                      <m:r>
-                        <a:rPr lang="en-US">
-                          <a:solidFill>
-                            <a:schemeClr val="accent6">
-                              <a:lumMod val="60000"/>
-                              <a:lumOff val="40000"/>
-                            </a:schemeClr>
-                          </a:solidFill>
-                          <a:latin typeface="Cambria Math" panose="02040503050406030204" pitchFamily="18" charset="0"/>
-                        </a:rPr>
-                        <m:t>×</m:t>
-                      </m:r>
-                      <m:r>
-                        <a:rPr lang="en-US">
-                          <a:solidFill>
-                            <a:schemeClr val="accent6">
-                              <a:lumMod val="60000"/>
-                              <a:lumOff val="40000"/>
-                            </a:schemeClr>
-                          </a:solidFill>
-                          <a:latin typeface="Cambria Math" panose="02040503050406030204" pitchFamily="18" charset="0"/>
-                        </a:rPr>
-                        <m:t>0</m:t>
-                      </m:r>
-                      <m:r>
-                        <a:rPr lang="en-US">
-                          <a:solidFill>
-                            <a:schemeClr val="accent6">
-                              <a:lumMod val="60000"/>
-                              <a:lumOff val="40000"/>
-                            </a:schemeClr>
-                          </a:solidFill>
-                          <a:latin typeface="Cambria Math" panose="02040503050406030204" pitchFamily="18" charset="0"/>
-                        </a:rPr>
-                        <m:t>.</m:t>
-                      </m:r>
-                      <m:r>
-                        <a:rPr lang="en-US">
-                          <a:solidFill>
-                            <a:schemeClr val="accent6">
-                              <a:lumMod val="60000"/>
-                              <a:lumOff val="40000"/>
-                            </a:schemeClr>
-                          </a:solidFill>
-                          <a:latin typeface="Cambria Math" panose="02040503050406030204" pitchFamily="18" charset="0"/>
-                        </a:rPr>
-                        <m:t>5</m:t>
-                      </m:r>
-                      <m:r>
-                        <a:rPr lang="en-US">
-                          <a:solidFill>
-                            <a:schemeClr val="accent6">
-                              <a:lumMod val="60000"/>
-                              <a:lumOff val="40000"/>
-                            </a:schemeClr>
-                          </a:solidFill>
-                          <a:latin typeface="Cambria Math" panose="02040503050406030204" pitchFamily="18" charset="0"/>
-                        </a:rPr>
-                        <m:t>×</m:t>
-                      </m:r>
-                      <m:r>
-                        <a:rPr lang="en-US">
-                          <a:solidFill>
-                            <a:schemeClr val="accent6">
-                              <a:lumMod val="60000"/>
-                              <a:lumOff val="40000"/>
-                            </a:schemeClr>
-                          </a:solidFill>
-                          <a:latin typeface="Cambria Math" panose="02040503050406030204" pitchFamily="18" charset="0"/>
-                        </a:rPr>
-                        <m:t>0</m:t>
-                      </m:r>
-                      <m:r>
-                        <a:rPr lang="en-US">
-                          <a:solidFill>
-                            <a:schemeClr val="accent6">
-                              <a:lumMod val="60000"/>
-                              <a:lumOff val="40000"/>
-                            </a:schemeClr>
-                          </a:solidFill>
-                          <a:latin typeface="Cambria Math" panose="02040503050406030204" pitchFamily="18" charset="0"/>
-                        </a:rPr>
-                        <m:t>.</m:t>
-                      </m:r>
-                      <m:r>
-                        <a:rPr lang="en-US">
-                          <a:solidFill>
-                            <a:schemeClr val="accent6">
-                              <a:lumMod val="60000"/>
-                              <a:lumOff val="40000"/>
-                            </a:schemeClr>
-                          </a:solidFill>
-                          <a:latin typeface="Cambria Math" panose="02040503050406030204" pitchFamily="18" charset="0"/>
-                        </a:rPr>
-                        <m:t>5</m:t>
-                      </m:r>
-                      <m:r>
-                        <a:rPr lang="en-US">
-                          <a:solidFill>
-                            <a:schemeClr val="accent6">
-                              <a:lumMod val="60000"/>
-                              <a:lumOff val="40000"/>
-                            </a:schemeClr>
-                          </a:solidFill>
-                          <a:latin typeface="Cambria Math" panose="02040503050406030204" pitchFamily="18" charset="0"/>
-                        </a:rPr>
-                        <m:t>×</m:t>
-                      </m:r>
-                      <m:r>
-                        <a:rPr lang="en-US">
-                          <a:solidFill>
-                            <a:schemeClr val="accent6">
-                              <a:lumMod val="60000"/>
-                              <a:lumOff val="40000"/>
-                            </a:schemeClr>
-                          </a:solidFill>
-                          <a:latin typeface="Cambria Math" panose="02040503050406030204" pitchFamily="18" charset="0"/>
-                        </a:rPr>
-                        <m:t>0</m:t>
-                      </m:r>
-                      <m:r>
-                        <a:rPr lang="en-US">
-                          <a:solidFill>
-                            <a:schemeClr val="accent6">
-                              <a:lumMod val="60000"/>
-                              <a:lumOff val="40000"/>
-                            </a:schemeClr>
-                          </a:solidFill>
-                          <a:latin typeface="Cambria Math" panose="02040503050406030204" pitchFamily="18" charset="0"/>
-                        </a:rPr>
-                        <m:t>.</m:t>
-                      </m:r>
-                      <m:r>
-                        <a:rPr lang="en-US">
-                          <a:solidFill>
-                            <a:schemeClr val="accent6">
-                              <a:lumMod val="60000"/>
-                              <a:lumOff val="40000"/>
-                            </a:schemeClr>
-                          </a:solidFill>
-                          <a:latin typeface="Cambria Math" panose="02040503050406030204" pitchFamily="18" charset="0"/>
-                        </a:rPr>
-                        <m:t>5</m:t>
-                      </m:r>
-                      <m:r>
-                        <a:rPr lang="en-US">
-                          <a:solidFill>
-                            <a:schemeClr val="accent6">
-                              <a:lumMod val="60000"/>
-                              <a:lumOff val="40000"/>
-                            </a:schemeClr>
-                          </a:solidFill>
-                          <a:latin typeface="Cambria Math" panose="02040503050406030204" pitchFamily="18" charset="0"/>
-                        </a:rPr>
-                        <m:t>⋯→</m:t>
-                      </m:r>
-                      <m:r>
-                        <a:rPr lang="en-US">
-                          <a:solidFill>
-                            <a:schemeClr val="accent6">
-                              <a:lumMod val="60000"/>
-                              <a:lumOff val="40000"/>
-                            </a:schemeClr>
-                          </a:solidFill>
-                          <a:latin typeface="Cambria Math" panose="02040503050406030204" pitchFamily="18" charset="0"/>
-                        </a:rPr>
-                        <m:t>0</m:t>
+                        <m:t>0.5×0.5×0.5×0.5⋯→0</m:t>
                       </m:r>
                     </m:oMath>
                   </m:oMathPara>
@@ -5046,7 +4854,7 @@
             </p:txBody>
           </p:sp>
         </mc:Choice>
-        <mc:Fallback>
+        <mc:Fallback xmlns="">
           <p:sp>
             <p:nvSpPr>
               <p:cNvPr id="7" name="TextBox 6">
@@ -5397,7 +5205,7 @@
         <p:spPr>
           <a:xfrm>
             <a:off x="621792" y="658797"/>
-            <a:ext cx="11365992" cy="5262979"/>
+            <a:ext cx="11365992" cy="6001643"/>
           </a:xfrm>
           <a:prstGeom prst="rect">
             <a:avLst/>
@@ -5480,7 +5288,74 @@
                   </a:schemeClr>
                 </a:solidFill>
               </a:rPr>
-              <a:t>Example : “Mouse is really good. The mouse is used to ____ for the easy use of computers.” Now if we can travel bidirectional and we can also see future context we may say ‘Scroll’ is the appropriate word here. But, if it’s unidirectional, our model has never seen computers so how does it know if we are talking about the animal mouse or computer mouse.</a:t>
+              <a:t>Example :</a:t>
+            </a:r>
+          </a:p>
+          <a:p>
+            <a:pPr marL="0" indent="0">
+              <a:buNone/>
+            </a:pPr>
+            <a:r>
+              <a:rPr lang="en-US" sz="2400" dirty="0">
+                <a:solidFill>
+                  <a:schemeClr val="accent6">
+                    <a:lumMod val="60000"/>
+                    <a:lumOff val="40000"/>
+                  </a:schemeClr>
+                </a:solidFill>
+              </a:rPr>
+              <a:t>“Mouse is really good. The mouse is used to ____ for the easy use of computers.” </a:t>
+            </a:r>
+          </a:p>
+          <a:p>
+            <a:pPr marL="0" indent="0">
+              <a:buNone/>
+            </a:pPr>
+            <a:endParaRPr lang="en-US" sz="2400" dirty="0">
+              <a:solidFill>
+                <a:schemeClr val="accent6">
+                  <a:lumMod val="60000"/>
+                  <a:lumOff val="40000"/>
+                </a:schemeClr>
+              </a:solidFill>
+            </a:endParaRPr>
+          </a:p>
+          <a:p>
+            <a:pPr marL="0" indent="0">
+              <a:buNone/>
+            </a:pPr>
+            <a:r>
+              <a:rPr lang="en-US" sz="2400" dirty="0">
+                <a:solidFill>
+                  <a:schemeClr val="accent6">
+                    <a:lumMod val="60000"/>
+                    <a:lumOff val="40000"/>
+                  </a:schemeClr>
+                </a:solidFill>
+              </a:rPr>
+              <a:t>Now </a:t>
+            </a:r>
+            <a:r>
+              <a:rPr lang="en-US" sz="2400" b="1" dirty="0">
+                <a:solidFill>
+                  <a:schemeClr val="accent6">
+                    <a:lumMod val="60000"/>
+                    <a:lumOff val="40000"/>
+                  </a:schemeClr>
+                </a:solidFill>
+              </a:rPr>
+              <a:t>if we can travel bidirectional </a:t>
+            </a:r>
+            <a:r>
+              <a:rPr lang="en-US" sz="2400" dirty="0">
+                <a:solidFill>
+                  <a:schemeClr val="accent6">
+                    <a:lumMod val="60000"/>
+                    <a:lumOff val="40000"/>
+                  </a:schemeClr>
+                </a:solidFill>
+              </a:rPr>
+              <a:t>and we can also see future context we may say ‘Scroll’ is the appropriate word here. But, if it’s unidirectional, our model has never seen computers so how does it know if we are talking about the animal mouse or computer mouse.</a:t>
             </a:r>
           </a:p>
           <a:p>
@@ -5976,8 +5851,8 @@
         </p:nvSpPr>
         <p:spPr>
           <a:xfrm>
-            <a:off x="256032" y="492299"/>
-            <a:ext cx="11512296" cy="707886"/>
+            <a:off x="192024" y="1013507"/>
+            <a:ext cx="11512296" cy="830997"/>
           </a:xfrm>
           <a:prstGeom prst="rect">
             <a:avLst/>
@@ -5991,7 +5866,7 @@
           <a:lstStyle/>
           <a:p>
             <a:r>
-              <a:rPr lang="en-US" sz="2000" b="1" dirty="0">
+              <a:rPr lang="en-US" sz="2400" b="1" dirty="0">
                 <a:solidFill>
                   <a:schemeClr val="accent6">
                     <a:lumMod val="60000"/>
@@ -5999,9 +5874,22 @@
                   </a:schemeClr>
                 </a:solidFill>
               </a:rPr>
-              <a:t>RNN is slower because it is sequential and depends on past computations, while normal feedforward networks (like CNNs or MLPs) can work on all parts in parallel.</a:t>
-            </a:r>
-            <a:endParaRPr lang="en-IN" sz="2000" b="1" dirty="0">
+              <a:t>RNN is slower because it is sequential and depends on past computations, </a:t>
+            </a:r>
+          </a:p>
+          <a:p>
+            <a:r>
+              <a:rPr lang="en-US" sz="2400" b="1" dirty="0">
+                <a:solidFill>
+                  <a:schemeClr val="accent6">
+                    <a:lumMod val="60000"/>
+                    <a:lumOff val="40000"/>
+                  </a:schemeClr>
+                </a:solidFill>
+              </a:rPr>
+              <a:t>while normal feedforward networks (like CNNs or MLPs) can work on all parts in parallel.</a:t>
+            </a:r>
+            <a:endParaRPr lang="en-IN" sz="2400" b="1" dirty="0">
               <a:solidFill>
                 <a:schemeClr val="accent6">
                   <a:lumMod val="60000"/>
@@ -6522,8 +6410,8 @@
           </a:p>
         </p:txBody>
       </p:sp>
-      <mc:AlternateContent xmlns:mc="http://schemas.openxmlformats.org/markup-compatibility/2006">
-        <mc:Choice xmlns:a14="http://schemas.microsoft.com/office/drawing/2010/main" Requires="a14">
+      <mc:AlternateContent xmlns:mc="http://schemas.openxmlformats.org/markup-compatibility/2006" xmlns:a14="http://schemas.microsoft.com/office/drawing/2010/main">
+        <mc:Choice Requires="a14">
           <p:sp>
             <p:nvSpPr>
               <p:cNvPr id="3" name="TextBox 2">
@@ -7842,7 +7730,7 @@
             </p:txBody>
           </p:sp>
         </mc:Choice>
-        <mc:Fallback>
+        <mc:Fallback xmlns="">
           <p:sp>
             <p:nvSpPr>
               <p:cNvPr id="3" name="TextBox 2">

--- a/deep_learning/3_RNN_NLP/3_LSTM_GRU/1_RNNdisadvantages_and_LSTM_need.pptx
+++ b/deep_learning/3_RNN_NLP/3_LSTM_GRU/1_RNNdisadvantages_and_LSTM_need.pptx
@@ -5,10 +5,10 @@
     <p:sldMasterId id="2147483648" r:id="rId1"/>
   </p:sldMasterIdLst>
   <p:notesMasterIdLst>
-    <p:notesMasterId r:id="rId12"/>
+    <p:notesMasterId r:id="rId13"/>
   </p:notesMasterIdLst>
   <p:handoutMasterIdLst>
-    <p:handoutMasterId r:id="rId13"/>
+    <p:handoutMasterId r:id="rId14"/>
   </p:handoutMasterIdLst>
   <p:sldIdLst>
     <p:sldId id="261" r:id="rId2"/>
@@ -21,6 +21,7 @@
     <p:sldId id="281" r:id="rId9"/>
     <p:sldId id="283" r:id="rId10"/>
     <p:sldId id="275" r:id="rId11"/>
+    <p:sldId id="284" r:id="rId12"/>
   </p:sldIdLst>
   <p:sldSz cx="12192000" cy="6858000"/>
   <p:notesSz cx="6858000" cy="9144000"/>
@@ -224,7 +225,7 @@
           <a:p>
             <a:fld id="{7BAEECA8-D063-486F-AE31-5020270C1449}" type="datetimeFigureOut">
               <a:rPr lang="en-US" smtClean="0"/>
-              <a:t>4/25/2026</a:t>
+              <a:t>5/5/2026</a:t>
             </a:fld>
             <a:endParaRPr lang="en-US"/>
           </a:p>
@@ -401,7 +402,7 @@
           <a:p>
             <a:fld id="{CB233BD1-3BA8-448D-9D08-7846095EA517}" type="datetimeFigureOut">
               <a:rPr lang="en-US" smtClean="0"/>
-              <a:t>4/25/2026</a:t>
+              <a:t>5/5/2026</a:t>
             </a:fld>
             <a:endParaRPr lang="en-US"/>
           </a:p>
@@ -1007,7 +1008,7 @@
           <a:p>
             <a:fld id="{6383FAE1-13DE-4511-8C1B-C8AFB720664C}" type="datetimeFigureOut">
               <a:rPr lang="en-US" smtClean="0"/>
-              <a:t>4/25/2026</a:t>
+              <a:t>5/5/2026</a:t>
             </a:fld>
             <a:endParaRPr lang="en-US"/>
           </a:p>
@@ -1205,7 +1206,7 @@
           <a:p>
             <a:fld id="{6383FAE1-13DE-4511-8C1B-C8AFB720664C}" type="datetimeFigureOut">
               <a:rPr lang="en-US" smtClean="0"/>
-              <a:t>4/25/2026</a:t>
+              <a:t>5/5/2026</a:t>
             </a:fld>
             <a:endParaRPr lang="en-US"/>
           </a:p>
@@ -1413,7 +1414,7 @@
           <a:p>
             <a:fld id="{6383FAE1-13DE-4511-8C1B-C8AFB720664C}" type="datetimeFigureOut">
               <a:rPr lang="en-US" smtClean="0"/>
-              <a:t>4/25/2026</a:t>
+              <a:t>5/5/2026</a:t>
             </a:fld>
             <a:endParaRPr lang="en-US"/>
           </a:p>
@@ -1611,7 +1612,7 @@
           <a:p>
             <a:fld id="{6383FAE1-13DE-4511-8C1B-C8AFB720664C}" type="datetimeFigureOut">
               <a:rPr lang="en-US" smtClean="0"/>
-              <a:t>4/25/2026</a:t>
+              <a:t>5/5/2026</a:t>
             </a:fld>
             <a:endParaRPr lang="en-US"/>
           </a:p>
@@ -1886,7 +1887,7 @@
           <a:p>
             <a:fld id="{6383FAE1-13DE-4511-8C1B-C8AFB720664C}" type="datetimeFigureOut">
               <a:rPr lang="en-US" smtClean="0"/>
-              <a:t>4/25/2026</a:t>
+              <a:t>5/5/2026</a:t>
             </a:fld>
             <a:endParaRPr lang="en-US"/>
           </a:p>
@@ -2151,7 +2152,7 @@
           <a:p>
             <a:fld id="{6383FAE1-13DE-4511-8C1B-C8AFB720664C}" type="datetimeFigureOut">
               <a:rPr lang="en-US" smtClean="0"/>
-              <a:t>4/25/2026</a:t>
+              <a:t>5/5/2026</a:t>
             </a:fld>
             <a:endParaRPr lang="en-US"/>
           </a:p>
@@ -2563,7 +2564,7 @@
           <a:p>
             <a:fld id="{6383FAE1-13DE-4511-8C1B-C8AFB720664C}" type="datetimeFigureOut">
               <a:rPr lang="en-US" smtClean="0"/>
-              <a:t>4/25/2026</a:t>
+              <a:t>5/5/2026</a:t>
             </a:fld>
             <a:endParaRPr lang="en-US"/>
           </a:p>
@@ -2704,7 +2705,7 @@
           <a:p>
             <a:fld id="{6383FAE1-13DE-4511-8C1B-C8AFB720664C}" type="datetimeFigureOut">
               <a:rPr lang="en-US" smtClean="0"/>
-              <a:t>4/25/2026</a:t>
+              <a:t>5/5/2026</a:t>
             </a:fld>
             <a:endParaRPr lang="en-US"/>
           </a:p>
@@ -2817,7 +2818,7 @@
           <a:p>
             <a:fld id="{6383FAE1-13DE-4511-8C1B-C8AFB720664C}" type="datetimeFigureOut">
               <a:rPr lang="en-US" smtClean="0"/>
-              <a:t>4/25/2026</a:t>
+              <a:t>5/5/2026</a:t>
             </a:fld>
             <a:endParaRPr lang="en-US"/>
           </a:p>
@@ -3128,7 +3129,7 @@
           <a:p>
             <a:fld id="{6383FAE1-13DE-4511-8C1B-C8AFB720664C}" type="datetimeFigureOut">
               <a:rPr lang="en-US" smtClean="0"/>
-              <a:t>4/25/2026</a:t>
+              <a:t>5/5/2026</a:t>
             </a:fld>
             <a:endParaRPr lang="en-US"/>
           </a:p>
@@ -3419,7 +3420,7 @@
           <a:p>
             <a:fld id="{6383FAE1-13DE-4511-8C1B-C8AFB720664C}" type="datetimeFigureOut">
               <a:rPr lang="en-US" smtClean="0"/>
-              <a:t>4/25/2026</a:t>
+              <a:t>5/5/2026</a:t>
             </a:fld>
             <a:endParaRPr lang="en-US"/>
           </a:p>
@@ -3663,7 +3664,7 @@
           <a:p>
             <a:fld id="{6383FAE1-13DE-4511-8C1B-C8AFB720664C}" type="datetimeFigureOut">
               <a:rPr lang="en-US" smtClean="0"/>
-              <a:t>4/25/2026</a:t>
+              <a:t>5/5/2026</a:t>
             </a:fld>
             <a:endParaRPr lang="en-US"/>
           </a:p>
@@ -4279,7 +4280,7 @@
         <p:spPr>
           <a:xfrm>
             <a:off x="173736" y="820246"/>
-            <a:ext cx="11695176" cy="4401205"/>
+            <a:ext cx="11695176" cy="6001643"/>
           </a:xfrm>
           <a:prstGeom prst="rect">
             <a:avLst/>
@@ -4296,7 +4297,7 @@
               <a:buNone/>
             </a:pPr>
             <a:r>
-              <a:rPr lang="en-US" sz="2000" b="1" dirty="0">
+              <a:rPr lang="en-US" sz="2400" b="1" dirty="0">
                 <a:solidFill>
                   <a:schemeClr val="accent6">
                     <a:lumMod val="60000"/>
@@ -4311,7 +4312,7 @@
             <a:pPr marL="0" indent="0" fontAlgn="ctr">
               <a:buNone/>
             </a:pPr>
-            <a:endParaRPr lang="en-US" sz="2000" dirty="0">
+            <a:endParaRPr lang="en-US" sz="2400" dirty="0">
               <a:solidFill>
                 <a:schemeClr val="accent6">
                   <a:lumMod val="60000"/>
@@ -4321,11 +4322,12 @@
             </a:endParaRPr>
           </a:p>
           <a:p>
-            <a:pPr marL="0" indent="0" fontAlgn="ctr">
-              <a:buNone/>
+            <a:pPr marL="342900" indent="-342900" fontAlgn="ctr">
+              <a:buFont typeface="Arial" panose="020B0604020202020204" pitchFamily="34" charset="0"/>
+              <a:buChar char="•"/>
             </a:pPr>
             <a:r>
-              <a:rPr lang="en-US" sz="2000" dirty="0">
+              <a:rPr lang="en-US" sz="2400" dirty="0">
                 <a:solidFill>
                   <a:schemeClr val="accent6">
                     <a:lumMod val="60000"/>
@@ -4340,8 +4342,21 @@
             <a:pPr marL="0" indent="0" fontAlgn="ctr">
               <a:buNone/>
             </a:pPr>
-            <a:r>
-              <a:rPr lang="en-US" sz="2000" dirty="0">
+            <a:endParaRPr lang="en-US" sz="2400" dirty="0">
+              <a:solidFill>
+                <a:schemeClr val="accent6">
+                  <a:lumMod val="60000"/>
+                  <a:lumOff val="40000"/>
+                </a:schemeClr>
+              </a:solidFill>
+            </a:endParaRPr>
+          </a:p>
+          <a:p>
+            <a:pPr marL="0" indent="0" fontAlgn="ctr">
+              <a:buNone/>
+            </a:pPr>
+            <a:r>
+              <a:rPr lang="en-US" sz="2400" b="1" dirty="0">
                 <a:solidFill>
                   <a:schemeClr val="accent6">
                     <a:lumMod val="60000"/>
@@ -4349,15 +4364,34 @@
                   </a:schemeClr>
                 </a:solidFill>
               </a:rPr>
-              <a:t>Basic RNNs have limited memory, making it difficult to remember and process information from previous time steps, especially when dealing with long sequences. </a:t>
-            </a:r>
+              <a:t>Reason: </a:t>
+            </a:r>
+            <a:r>
+              <a:rPr lang="en-US" sz="2400" dirty="0">
+                <a:solidFill>
+                  <a:schemeClr val="accent6">
+                    <a:lumMod val="60000"/>
+                    <a:lumOff val="40000"/>
+                  </a:schemeClr>
+                </a:solidFill>
+              </a:rPr>
+              <a:t>They have limited memory</a:t>
+            </a:r>
+            <a:endParaRPr lang="en-US" sz="2400" b="1" dirty="0">
+              <a:solidFill>
+                <a:schemeClr val="accent6">
+                  <a:lumMod val="60000"/>
+                  <a:lumOff val="40000"/>
+                </a:schemeClr>
+              </a:solidFill>
+            </a:endParaRPr>
           </a:p>
           <a:p>
             <a:pPr marL="0" indent="0" fontAlgn="ctr">
               <a:buNone/>
             </a:pPr>
             <a:r>
-              <a:rPr lang="en-US" sz="2000" dirty="0">
+              <a:rPr lang="en-US" sz="2400" dirty="0">
                 <a:solidFill>
                   <a:schemeClr val="accent6">
                     <a:lumMod val="60000"/>
@@ -4372,8 +4406,21 @@
             <a:pPr marL="0" indent="0" fontAlgn="ctr">
               <a:buNone/>
             </a:pPr>
-            <a:r>
-              <a:rPr lang="en-US" sz="2000" dirty="0">
+            <a:endParaRPr lang="en-US" sz="2400" dirty="0">
+              <a:solidFill>
+                <a:schemeClr val="accent6">
+                  <a:lumMod val="60000"/>
+                  <a:lumOff val="40000"/>
+                </a:schemeClr>
+              </a:solidFill>
+            </a:endParaRPr>
+          </a:p>
+          <a:p>
+            <a:pPr marL="0" indent="0" fontAlgn="ctr">
+              <a:buNone/>
+            </a:pPr>
+            <a:r>
+              <a:rPr lang="en-US" sz="2400" dirty="0">
                 <a:solidFill>
                   <a:schemeClr val="accent6">
                     <a:lumMod val="60000"/>
@@ -4389,7 +4436,7 @@
               <a:buNone/>
             </a:pPr>
             <a:r>
-              <a:rPr lang="en-US" sz="2000" dirty="0">
+              <a:rPr lang="en-US" sz="2400" dirty="0">
                 <a:solidFill>
                   <a:schemeClr val="accent6">
                     <a:lumMod val="60000"/>
@@ -4397,15 +4444,28 @@
                   </a:schemeClr>
                 </a:solidFill>
               </a:rPr>
-              <a:t>But important information ("Diwali") is hidden behind lots of extra words (celebrated by millions, across countries, lamps, sweets, decorations, gatherings...).</a:t>
+              <a:t>But important information ("Diwali") is hidden behind lots of extra words: celebrated by millions, across countries, lamps, sweets, decorations, gatherings.</a:t>
             </a:r>
           </a:p>
           <a:p>
             <a:pPr marL="0" indent="0" fontAlgn="ctr">
               <a:buNone/>
             </a:pPr>
-            <a:r>
-              <a:rPr lang="en-US" sz="2000" dirty="0">
+            <a:endParaRPr lang="en-US" sz="2400" dirty="0">
+              <a:solidFill>
+                <a:schemeClr val="accent6">
+                  <a:lumMod val="60000"/>
+                  <a:lumOff val="40000"/>
+                </a:schemeClr>
+              </a:solidFill>
+            </a:endParaRPr>
+          </a:p>
+          <a:p>
+            <a:pPr marL="0" indent="0" fontAlgn="ctr">
+              <a:buNone/>
+            </a:pPr>
+            <a:r>
+              <a:rPr lang="en-US" sz="2400" dirty="0">
                 <a:solidFill>
                   <a:schemeClr val="accent6">
                     <a:lumMod val="60000"/>
@@ -4454,47 +4514,42 @@
           <a:chExt cx="0" cy="0"/>
         </a:xfrm>
       </p:grpSpPr>
-      <p:sp>
-        <p:nvSpPr>
-          <p:cNvPr id="2" name="Title 1">
+      <p:pic>
+        <p:nvPicPr>
+          <p:cNvPr id="7" name="Picture 6">
             <a:extLst>
               <a:ext uri="{FF2B5EF4-FFF2-40B4-BE49-F238E27FC236}">
-                <a16:creationId xmlns:a16="http://schemas.microsoft.com/office/drawing/2014/main" id="{795E1B75-886E-0812-B2FD-DD250C225521}"/>
+                <a16:creationId xmlns:a16="http://schemas.microsoft.com/office/drawing/2014/main" id="{3E91895B-CCF8-A3DA-98E6-C7933EA32E98}"/>
               </a:ext>
             </a:extLst>
           </p:cNvPr>
-          <p:cNvSpPr>
-            <a:spLocks noGrp="1"/>
-          </p:cNvSpPr>
-          <p:nvPr>
-            <p:ph type="title"/>
-          </p:nvPr>
-        </p:nvSpPr>
+          <p:cNvPicPr>
+            <a:picLocks noChangeAspect="1"/>
+          </p:cNvPicPr>
+          <p:nvPr/>
+        </p:nvPicPr>
+        <p:blipFill>
+          <a:blip r:embed="rId2"/>
+          <a:stretch>
+            <a:fillRect/>
+          </a:stretch>
+        </p:blipFill>
         <p:spPr>
           <a:xfrm>
-            <a:off x="274320" y="136525"/>
-            <a:ext cx="11466576" cy="832739"/>
+            <a:off x="1744793" y="784663"/>
+            <a:ext cx="8135485" cy="2819794"/>
           </a:xfrm>
+          <a:prstGeom prst="rect">
+            <a:avLst/>
+          </a:prstGeom>
         </p:spPr>
-        <p:txBody>
-          <a:bodyPr>
-            <a:normAutofit/>
-          </a:bodyPr>
-          <a:lstStyle/>
-          <a:p>
-            <a:r>
-              <a:rPr lang="en-US" sz="3600" dirty="0"/>
-              <a:t>EXTRA</a:t>
-            </a:r>
-          </a:p>
-        </p:txBody>
-      </p:sp>
+      </p:pic>
       <p:sp>
         <p:nvSpPr>
-          <p:cNvPr id="4" name="TextBox 3">
+          <p:cNvPr id="8" name="TextBox 7">
             <a:extLst>
               <a:ext uri="{FF2B5EF4-FFF2-40B4-BE49-F238E27FC236}">
-                <a16:creationId xmlns:a16="http://schemas.microsoft.com/office/drawing/2014/main" id="{902F8BE4-9CEA-0DAD-0357-E0A8215F169D}"/>
+                <a16:creationId xmlns:a16="http://schemas.microsoft.com/office/drawing/2014/main" id="{E4B67545-33EA-4D06-1428-254520650DF7}"/>
               </a:ext>
             </a:extLst>
           </p:cNvPr>
@@ -4503,8 +4558,8 @@
         </p:nvSpPr>
         <p:spPr>
           <a:xfrm>
-            <a:off x="274320" y="933117"/>
-            <a:ext cx="11658600" cy="646331"/>
+            <a:off x="2999232" y="4764024"/>
+            <a:ext cx="3312061" cy="369332"/>
           </a:xfrm>
           <a:prstGeom prst="rect">
             <a:avLst/>
@@ -4512,14 +4567,22 @@
           <a:noFill/>
         </p:spPr>
         <p:txBody>
-          <a:bodyPr wrap="square">
+          <a:bodyPr wrap="none" rtlCol="0">
             <a:spAutoFit/>
           </a:bodyPr>
           <a:lstStyle/>
           <a:p>
-            <a:pPr marL="0" indent="0">
-              <a:buNone/>
-            </a:pPr>
+            <a:r>
+              <a:rPr lang="en-US" dirty="0">
+                <a:solidFill>
+                  <a:schemeClr val="accent6">
+                    <a:lumMod val="60000"/>
+                    <a:lumOff val="40000"/>
+                  </a:schemeClr>
+                </a:solidFill>
+              </a:rPr>
+              <a:t>Source: internet (</a:t>
+            </a:r>
             <a:r>
               <a:rPr lang="en-US" dirty="0" err="1">
                 <a:solidFill>
@@ -4529,23 +4592,10 @@
                   </a:schemeClr>
                 </a:solidFill>
               </a:rPr>
-              <a:t>Xxxxxxxxxxx</a:t>
-            </a:r>
-            <a:endParaRPr lang="en-US" dirty="0">
-              <a:solidFill>
-                <a:schemeClr val="accent6">
-                  <a:lumMod val="60000"/>
-                  <a:lumOff val="40000"/>
-                </a:schemeClr>
-              </a:solidFill>
-            </a:endParaRPr>
-          </a:p>
-          <a:p>
-            <a:pPr marL="0" indent="0">
-              <a:buNone/>
-            </a:pPr>
-            <a:r>
-              <a:rPr lang="en-US" dirty="0" err="1">
+              <a:t>analyticsvidhya</a:t>
+            </a:r>
+            <a:r>
+              <a:rPr lang="en-US" dirty="0">
                 <a:solidFill>
                   <a:schemeClr val="accent6">
                     <a:lumMod val="60000"/>
@@ -4553,16 +4603,8 @@
                   </a:schemeClr>
                 </a:solidFill>
               </a:rPr>
-              <a:t>xxxxxxxxxxxx</a:t>
-            </a:r>
-            <a:endParaRPr lang="en-US" dirty="0">
-              <a:solidFill>
-                <a:schemeClr val="accent6">
-                  <a:lumMod val="60000"/>
-                  <a:lumOff val="40000"/>
-                </a:schemeClr>
-              </a:solidFill>
-            </a:endParaRPr>
+              <a:t>)</a:t>
+            </a:r>
           </a:p>
         </p:txBody>
       </p:sp>
@@ -4570,6 +4612,42 @@
     <p:extLst>
       <p:ext uri="{BB962C8B-B14F-4D97-AF65-F5344CB8AC3E}">
         <p14:creationId xmlns:p14="http://schemas.microsoft.com/office/powerpoint/2010/main" val="366625378"/>
+      </p:ext>
+    </p:extLst>
+  </p:cSld>
+  <p:clrMapOvr>
+    <a:masterClrMapping/>
+  </p:clrMapOvr>
+</p:sld>
+</file>
+
+<file path=ppt/slides/slide11.xml><?xml version="1.0" encoding="utf-8"?>
+<p:sld xmlns:a="http://schemas.openxmlformats.org/drawingml/2006/main" xmlns:r="http://schemas.openxmlformats.org/officeDocument/2006/relationships" xmlns:p="http://schemas.openxmlformats.org/presentationml/2006/main">
+  <p:cSld>
+    <p:spTree>
+      <p:nvGrpSpPr>
+        <p:cNvPr id="1" name="">
+          <a:extLst>
+            <a:ext uri="{FF2B5EF4-FFF2-40B4-BE49-F238E27FC236}">
+              <a16:creationId xmlns:a16="http://schemas.microsoft.com/office/drawing/2014/main" id="{EFDDE53B-D882-F803-9DA1-A6508A034CC1}"/>
+            </a:ext>
+          </a:extLst>
+        </p:cNvPr>
+        <p:cNvGrpSpPr/>
+        <p:nvPr/>
+      </p:nvGrpSpPr>
+      <p:grpSpPr>
+        <a:xfrm>
+          <a:off x="0" y="0"/>
+          <a:ext cx="0" cy="0"/>
+          <a:chOff x="0" y="0"/>
+          <a:chExt cx="0" cy="0"/>
+        </a:xfrm>
+      </p:grpSpPr>
+    </p:spTree>
+    <p:extLst>
+      <p:ext uri="{BB962C8B-B14F-4D97-AF65-F5344CB8AC3E}">
+        <p14:creationId xmlns:p14="http://schemas.microsoft.com/office/powerpoint/2010/main" val="344303828"/>
       </p:ext>
     </p:extLst>
   </p:cSld>
@@ -4644,8 +4722,8 @@
           </a:p>
         </p:txBody>
       </p:sp>
-      <mc:AlternateContent xmlns:mc="http://schemas.openxmlformats.org/markup-compatibility/2006" xmlns:a14="http://schemas.microsoft.com/office/drawing/2010/main">
-        <mc:Choice Requires="a14">
+      <mc:AlternateContent xmlns:mc="http://schemas.openxmlformats.org/markup-compatibility/2006">
+        <mc:Choice xmlns:a14="http://schemas.microsoft.com/office/drawing/2010/main" Requires="a14">
           <p:sp>
             <p:nvSpPr>
               <p:cNvPr id="7" name="TextBox 6">
@@ -4661,7 +4739,7 @@
             <p:spPr>
               <a:xfrm>
                 <a:off x="173736" y="820246"/>
-                <a:ext cx="11695176" cy="3139321"/>
+                <a:ext cx="11695176" cy="3416320"/>
               </a:xfrm>
               <a:prstGeom prst="rect">
                 <a:avLst/>
@@ -4678,7 +4756,7 @@
                   <a:buNone/>
                 </a:pPr>
                 <a:r>
-                  <a:rPr lang="en-US" sz="2000" b="1" dirty="0">
+                  <a:rPr lang="en-US" sz="2400" b="1" dirty="0">
                     <a:solidFill>
                       <a:schemeClr val="accent6">
                         <a:lumMod val="60000"/>
@@ -4693,7 +4771,7 @@
                 <a:pPr marL="0" indent="0">
                   <a:buNone/>
                 </a:pPr>
-                <a:endParaRPr lang="en-US" sz="2000" b="1" dirty="0">
+                <a:endParaRPr lang="en-US" sz="2400" b="1" dirty="0">
                   <a:solidFill>
                     <a:schemeClr val="accent6">
                       <a:lumMod val="60000"/>
@@ -4707,7 +4785,7 @@
                   <a:buNone/>
                 </a:pPr>
                 <a:r>
-                  <a:rPr lang="en-US" sz="2000" b="1" dirty="0">
+                  <a:rPr lang="en-US" sz="2400" b="1" dirty="0">
                     <a:solidFill>
                       <a:schemeClr val="accent6">
                         <a:lumMod val="60000"/>
@@ -4718,7 +4796,7 @@
                   <a:t>Meaning/context is "diluted"</a:t>
                 </a:r>
                 <a:r>
-                  <a:rPr lang="en-US" sz="2000" dirty="0">
+                  <a:rPr lang="en-US" sz="2400" dirty="0">
                     <a:solidFill>
                       <a:schemeClr val="accent6">
                         <a:lumMod val="60000"/>
@@ -4734,7 +4812,7 @@
                   <a:buNone/>
                 </a:pPr>
                 <a:r>
-                  <a:rPr lang="en-US" sz="2000" dirty="0">
+                  <a:rPr lang="en-US" sz="2400" dirty="0">
                     <a:solidFill>
                       <a:schemeClr val="accent6">
                         <a:lumMod val="60000"/>
@@ -4745,7 +4823,7 @@
                   <a:t>As more steps pass, the important signal fades (this is called </a:t>
                 </a:r>
                 <a:r>
-                  <a:rPr lang="en-US" sz="2000" b="1" dirty="0">
+                  <a:rPr lang="en-US" sz="2400" b="1" dirty="0">
                     <a:solidFill>
                       <a:schemeClr val="accent6">
                         <a:lumMod val="60000"/>
@@ -4756,7 +4834,7 @@
                   <a:t>vanishing gradient during training)</a:t>
                 </a:r>
                 <a:r>
-                  <a:rPr lang="en-US" sz="2000" dirty="0">
+                  <a:rPr lang="en-US" sz="2400" dirty="0">
                     <a:solidFill>
                       <a:schemeClr val="accent6">
                         <a:lumMod val="60000"/>
@@ -4771,7 +4849,7 @@
                 <a:pPr marL="0" indent="0" fontAlgn="ctr">
                   <a:buNone/>
                 </a:pPr>
-                <a:endParaRPr lang="en-US" sz="2000" dirty="0">
+                <a:endParaRPr lang="en-US" sz="2400" dirty="0">
                   <a:solidFill>
                     <a:schemeClr val="accent6">
                       <a:lumMod val="60000"/>
@@ -4784,7 +4862,7 @@
                 <a:pPr marL="0" indent="0" fontAlgn="ctr">
                   <a:buNone/>
                 </a:pPr>
-                <a:endParaRPr lang="en-US" sz="2000" dirty="0">
+                <a:endParaRPr lang="en-US" sz="2400" dirty="0">
                   <a:solidFill>
                     <a:schemeClr val="accent6">
                       <a:lumMod val="60000"/>
@@ -4795,7 +4873,7 @@
               </a:p>
               <a:p>
                 <a:r>
-                  <a:rPr lang="en-US" sz="2000" dirty="0">
+                  <a:rPr lang="en-US" sz="2400" dirty="0">
                     <a:solidFill>
                       <a:schemeClr val="accent6">
                         <a:lumMod val="60000"/>
@@ -4815,7 +4893,7 @@
                     </m:oMathParaPr>
                     <m:oMath xmlns:m="http://schemas.openxmlformats.org/officeDocument/2006/math">
                       <m:r>
-                        <a:rPr lang="en-US">
+                        <a:rPr lang="en-US" sz="2400">
                           <a:solidFill>
                             <a:schemeClr val="accent6">
                               <a:lumMod val="60000"/>
@@ -4824,25 +4902,204 @@
                           </a:solidFill>
                           <a:latin typeface="Cambria Math" panose="02040503050406030204" pitchFamily="18" charset="0"/>
                         </a:rPr>
-                        <m:t>0.5×0.5×0.5×0.5⋯→0</m:t>
+                        <m:t>0</m:t>
+                      </m:r>
+                      <m:r>
+                        <a:rPr lang="en-US" sz="2400">
+                          <a:solidFill>
+                            <a:schemeClr val="accent6">
+                              <a:lumMod val="60000"/>
+                              <a:lumOff val="40000"/>
+                            </a:schemeClr>
+                          </a:solidFill>
+                          <a:latin typeface="Cambria Math" panose="02040503050406030204" pitchFamily="18" charset="0"/>
+                        </a:rPr>
+                        <m:t>.</m:t>
+                      </m:r>
+                      <m:r>
+                        <a:rPr lang="en-US" sz="2400">
+                          <a:solidFill>
+                            <a:schemeClr val="accent6">
+                              <a:lumMod val="60000"/>
+                              <a:lumOff val="40000"/>
+                            </a:schemeClr>
+                          </a:solidFill>
+                          <a:latin typeface="Cambria Math" panose="02040503050406030204" pitchFamily="18" charset="0"/>
+                        </a:rPr>
+                        <m:t>5</m:t>
+                      </m:r>
+                      <m:r>
+                        <a:rPr lang="en-US" sz="2400">
+                          <a:solidFill>
+                            <a:schemeClr val="accent6">
+                              <a:lumMod val="60000"/>
+                              <a:lumOff val="40000"/>
+                            </a:schemeClr>
+                          </a:solidFill>
+                          <a:latin typeface="Cambria Math" panose="02040503050406030204" pitchFamily="18" charset="0"/>
+                        </a:rPr>
+                        <m:t>×</m:t>
+                      </m:r>
+                      <m:r>
+                        <a:rPr lang="en-US" sz="2400">
+                          <a:solidFill>
+                            <a:schemeClr val="accent6">
+                              <a:lumMod val="60000"/>
+                              <a:lumOff val="40000"/>
+                            </a:schemeClr>
+                          </a:solidFill>
+                          <a:latin typeface="Cambria Math" panose="02040503050406030204" pitchFamily="18" charset="0"/>
+                        </a:rPr>
+                        <m:t>0</m:t>
+                      </m:r>
+                      <m:r>
+                        <a:rPr lang="en-US" sz="2400">
+                          <a:solidFill>
+                            <a:schemeClr val="accent6">
+                              <a:lumMod val="60000"/>
+                              <a:lumOff val="40000"/>
+                            </a:schemeClr>
+                          </a:solidFill>
+                          <a:latin typeface="Cambria Math" panose="02040503050406030204" pitchFamily="18" charset="0"/>
+                        </a:rPr>
+                        <m:t>.</m:t>
+                      </m:r>
+                      <m:r>
+                        <a:rPr lang="en-US" sz="2400">
+                          <a:solidFill>
+                            <a:schemeClr val="accent6">
+                              <a:lumMod val="60000"/>
+                              <a:lumOff val="40000"/>
+                            </a:schemeClr>
+                          </a:solidFill>
+                          <a:latin typeface="Cambria Math" panose="02040503050406030204" pitchFamily="18" charset="0"/>
+                        </a:rPr>
+                        <m:t>5</m:t>
+                      </m:r>
+                      <m:r>
+                        <a:rPr lang="en-US" sz="2400">
+                          <a:solidFill>
+                            <a:schemeClr val="accent6">
+                              <a:lumMod val="60000"/>
+                              <a:lumOff val="40000"/>
+                            </a:schemeClr>
+                          </a:solidFill>
+                          <a:latin typeface="Cambria Math" panose="02040503050406030204" pitchFamily="18" charset="0"/>
+                        </a:rPr>
+                        <m:t>×</m:t>
+                      </m:r>
+                      <m:r>
+                        <a:rPr lang="en-US" sz="2400">
+                          <a:solidFill>
+                            <a:schemeClr val="accent6">
+                              <a:lumMod val="60000"/>
+                              <a:lumOff val="40000"/>
+                            </a:schemeClr>
+                          </a:solidFill>
+                          <a:latin typeface="Cambria Math" panose="02040503050406030204" pitchFamily="18" charset="0"/>
+                        </a:rPr>
+                        <m:t>0</m:t>
+                      </m:r>
+                      <m:r>
+                        <a:rPr lang="en-US" sz="2400">
+                          <a:solidFill>
+                            <a:schemeClr val="accent6">
+                              <a:lumMod val="60000"/>
+                              <a:lumOff val="40000"/>
+                            </a:schemeClr>
+                          </a:solidFill>
+                          <a:latin typeface="Cambria Math" panose="02040503050406030204" pitchFamily="18" charset="0"/>
+                        </a:rPr>
+                        <m:t>.</m:t>
+                      </m:r>
+                      <m:r>
+                        <a:rPr lang="en-US" sz="2400">
+                          <a:solidFill>
+                            <a:schemeClr val="accent6">
+                              <a:lumMod val="60000"/>
+                              <a:lumOff val="40000"/>
+                            </a:schemeClr>
+                          </a:solidFill>
+                          <a:latin typeface="Cambria Math" panose="02040503050406030204" pitchFamily="18" charset="0"/>
+                        </a:rPr>
+                        <m:t>5</m:t>
+                      </m:r>
+                      <m:r>
+                        <a:rPr lang="en-US" sz="2400">
+                          <a:solidFill>
+                            <a:schemeClr val="accent6">
+                              <a:lumMod val="60000"/>
+                              <a:lumOff val="40000"/>
+                            </a:schemeClr>
+                          </a:solidFill>
+                          <a:latin typeface="Cambria Math" panose="02040503050406030204" pitchFamily="18" charset="0"/>
+                        </a:rPr>
+                        <m:t>×</m:t>
+                      </m:r>
+                      <m:r>
+                        <a:rPr lang="en-US" sz="2400">
+                          <a:solidFill>
+                            <a:schemeClr val="accent6">
+                              <a:lumMod val="60000"/>
+                              <a:lumOff val="40000"/>
+                            </a:schemeClr>
+                          </a:solidFill>
+                          <a:latin typeface="Cambria Math" panose="02040503050406030204" pitchFamily="18" charset="0"/>
+                        </a:rPr>
+                        <m:t>0</m:t>
+                      </m:r>
+                      <m:r>
+                        <a:rPr lang="en-US" sz="2400">
+                          <a:solidFill>
+                            <a:schemeClr val="accent6">
+                              <a:lumMod val="60000"/>
+                              <a:lumOff val="40000"/>
+                            </a:schemeClr>
+                          </a:solidFill>
+                          <a:latin typeface="Cambria Math" panose="02040503050406030204" pitchFamily="18" charset="0"/>
+                        </a:rPr>
+                        <m:t>.</m:t>
+                      </m:r>
+                      <m:r>
+                        <a:rPr lang="en-US" sz="2400">
+                          <a:solidFill>
+                            <a:schemeClr val="accent6">
+                              <a:lumMod val="60000"/>
+                              <a:lumOff val="40000"/>
+                            </a:schemeClr>
+                          </a:solidFill>
+                          <a:latin typeface="Cambria Math" panose="02040503050406030204" pitchFamily="18" charset="0"/>
+                        </a:rPr>
+                        <m:t>5</m:t>
+                      </m:r>
+                      <m:r>
+                        <a:rPr lang="en-US" sz="2400">
+                          <a:solidFill>
+                            <a:schemeClr val="accent6">
+                              <a:lumMod val="60000"/>
+                              <a:lumOff val="40000"/>
+                            </a:schemeClr>
+                          </a:solidFill>
+                          <a:latin typeface="Cambria Math" panose="02040503050406030204" pitchFamily="18" charset="0"/>
+                        </a:rPr>
+                        <m:t>⋯→</m:t>
+                      </m:r>
+                      <m:r>
+                        <a:rPr lang="en-US" sz="2400">
+                          <a:solidFill>
+                            <a:schemeClr val="accent6">
+                              <a:lumMod val="60000"/>
+                              <a:lumOff val="40000"/>
+                            </a:schemeClr>
+                          </a:solidFill>
+                          <a:latin typeface="Cambria Math" panose="02040503050406030204" pitchFamily="18" charset="0"/>
+                        </a:rPr>
+                        <m:t>0</m:t>
                       </m:r>
                     </m:oMath>
                   </m:oMathPara>
                 </a14:m>
-                <a:endParaRPr lang="en-US" sz="2000" dirty="0">
-                  <a:solidFill>
-                    <a:schemeClr val="accent6">
-                      <a:lumMod val="60000"/>
-                      <a:lumOff val="40000"/>
-                    </a:schemeClr>
-                  </a:solidFill>
-                </a:endParaRPr>
-              </a:p>
-              <a:p>
-                <a:pPr marL="0" indent="0" fontAlgn="ctr">
-                  <a:buNone/>
-                </a:pPr>
-                <a:endParaRPr lang="en-US" sz="2000" dirty="0">
+                <a:endParaRPr lang="en-US" sz="2400" dirty="0">
                   <a:solidFill>
                     <a:schemeClr val="accent6">
                       <a:lumMod val="60000"/>
@@ -4854,7 +5111,7 @@
             </p:txBody>
           </p:sp>
         </mc:Choice>
-        <mc:Fallback xmlns="">
+        <mc:Fallback>
           <p:sp>
             <p:nvSpPr>
               <p:cNvPr id="7" name="TextBox 6">
@@ -4872,7 +5129,7 @@
             <p:spPr>
               <a:xfrm>
                 <a:off x="173736" y="820246"/>
-                <a:ext cx="11695176" cy="3139321"/>
+                <a:ext cx="11695176" cy="3416320"/>
               </a:xfrm>
               <a:prstGeom prst="rect">
                 <a:avLst/>
@@ -4880,7 +5137,7 @@
               <a:blipFill>
                 <a:blip r:embed="rId2"/>
                 <a:stretch>
-                  <a:fillRect l="-574" t="-1165" r="-52"/>
+                  <a:fillRect l="-834" t="-1429"/>
                 </a:stretch>
               </a:blipFill>
             </p:spPr>
@@ -4974,7 +5231,7 @@
         <p:spPr>
           <a:xfrm>
             <a:off x="219456" y="290126"/>
-            <a:ext cx="11658600" cy="4401205"/>
+            <a:ext cx="11658600" cy="6001643"/>
           </a:xfrm>
           <a:prstGeom prst="rect">
             <a:avLst/>
@@ -4991,7 +5248,7 @@
               <a:buNone/>
             </a:pPr>
             <a:r>
-              <a:rPr lang="en-US" sz="2000" b="1" dirty="0">
+              <a:rPr lang="en-US" sz="2400" b="1" dirty="0">
                 <a:solidFill>
                   <a:schemeClr val="accent6">
                     <a:lumMod val="60000"/>
@@ -5008,7 +5265,7 @@
               <a:buAutoNum type="arabicPeriod"/>
             </a:pPr>
             <a:r>
-              <a:rPr lang="en-US" sz="2000" dirty="0">
+              <a:rPr lang="en-US" sz="2400" dirty="0">
                 <a:solidFill>
                   <a:schemeClr val="accent6">
                     <a:lumMod val="60000"/>
@@ -5025,7 +5282,7 @@
               <a:buAutoNum type="arabicPeriod"/>
             </a:pPr>
             <a:r>
-              <a:rPr lang="en-US" sz="2000" dirty="0">
+              <a:rPr lang="en-US" sz="2400" dirty="0">
                 <a:solidFill>
                   <a:schemeClr val="accent6">
                     <a:lumMod val="60000"/>
@@ -5042,7 +5299,7 @@
               <a:buAutoNum type="arabicPeriod"/>
             </a:pPr>
             <a:r>
-              <a:rPr lang="en-US" sz="2000" dirty="0">
+              <a:rPr lang="en-US" sz="2400" dirty="0">
                 <a:solidFill>
                   <a:schemeClr val="accent6">
                     <a:lumMod val="60000"/>
@@ -5050,7 +5307,7 @@
                   </a:schemeClr>
                 </a:solidFill>
               </a:rPr>
-              <a:t>If the weights are small (e.g., 0.5), then multiplying many times makes gradients shrink exponentially toward zero.</a:t>
+              <a:t>If the weights are small (e.g., 0.5), then multiplying many times makes gradients shrink exponentially toward zero. </a:t>
             </a:r>
           </a:p>
           <a:p>
@@ -5059,7 +5316,7 @@
               <a:buAutoNum type="arabicPeriod"/>
             </a:pPr>
             <a:r>
-              <a:rPr lang="en-US" sz="2000" dirty="0">
+              <a:rPr lang="en-US" sz="2400" dirty="0">
                 <a:solidFill>
                   <a:schemeClr val="accent6">
                     <a:lumMod val="60000"/>
@@ -5076,7 +5333,7 @@
               <a:buAutoNum type="arabicPeriod"/>
             </a:pPr>
             <a:r>
-              <a:rPr lang="en-US" sz="2000" dirty="0">
+              <a:rPr lang="en-US" sz="2400" dirty="0">
                 <a:solidFill>
                   <a:schemeClr val="accent6">
                     <a:lumMod val="60000"/>
@@ -5084,7 +5341,7 @@
                   </a:schemeClr>
                 </a:solidFill>
               </a:rPr>
-              <a:t>As a result, the RNN forgets long-term information because the model can't learn from early parts of the sequence.</a:t>
+              <a:t>As a result, the RNN forgets long-term information</a:t>
             </a:r>
           </a:p>
           <a:p>
@@ -5093,7 +5350,7 @@
               <a:buAutoNum type="arabicPeriod"/>
             </a:pPr>
             <a:r>
-              <a:rPr lang="en-US" sz="2000" dirty="0">
+              <a:rPr lang="en-US" sz="2400" dirty="0">
                 <a:solidFill>
                   <a:schemeClr val="accent6">
                     <a:lumMod val="60000"/>
@@ -5109,7 +5366,7 @@
               <a:buNone/>
             </a:pPr>
             <a:r>
-              <a:rPr lang="en-US" sz="2000" b="1" dirty="0">
+              <a:rPr lang="en-US" sz="2400" b="1" dirty="0">
                 <a:solidFill>
                   <a:schemeClr val="accent6">
                     <a:lumMod val="60000"/>
@@ -5120,7 +5377,7 @@
               <a:t>Backpropagation + many time steps + small weights = vanishing gradient = RNN forgets long-term memory</a:t>
             </a:r>
             <a:r>
-              <a:rPr lang="en-US" sz="2000" dirty="0">
+              <a:rPr lang="en-US" sz="2400" dirty="0">
                 <a:solidFill>
                   <a:schemeClr val="accent6">
                     <a:lumMod val="60000"/>
@@ -5136,7 +5393,7 @@
               <a:buNone/>
             </a:pPr>
             <a:r>
-              <a:rPr lang="en-US" sz="2000" b="1" dirty="0">
+              <a:rPr lang="en-US" sz="2400" b="1" dirty="0">
                 <a:solidFill>
                   <a:schemeClr val="accent6">
                     <a:lumMod val="60000"/>
@@ -5147,7 +5404,7 @@
               <a:t>Read </a:t>
             </a:r>
             <a:r>
-              <a:rPr lang="en-US" sz="2000" dirty="0">
+              <a:rPr lang="en-US" sz="2400" dirty="0">
                 <a:solidFill>
                   <a:schemeClr val="accent6">
                     <a:lumMod val="60000"/>
@@ -5204,7 +5461,7 @@
         </p:nvSpPr>
         <p:spPr>
           <a:xfrm>
-            <a:off x="621792" y="658797"/>
+            <a:off x="173736" y="146733"/>
             <a:ext cx="11365992" cy="6001643"/>
           </a:xfrm>
           <a:prstGeom prst="rect">
@@ -5938,7 +6195,7 @@
         </p:nvSpPr>
         <p:spPr>
           <a:xfrm>
-            <a:off x="329184" y="1512666"/>
+            <a:off x="118872" y="744570"/>
             <a:ext cx="11658599" cy="2246769"/>
           </a:xfrm>
           <a:prstGeom prst="rect">
@@ -6138,7 +6395,7 @@
         <p:spPr>
           <a:xfrm>
             <a:off x="201168" y="706642"/>
-            <a:ext cx="11064240" cy="3785652"/>
+            <a:ext cx="11064240" cy="3416320"/>
           </a:xfrm>
           <a:prstGeom prst="rect">
             <a:avLst/>
@@ -6152,7 +6409,7 @@
           <a:lstStyle/>
           <a:p>
             <a:r>
-              <a:rPr lang="en-US" sz="2400" dirty="0">
+              <a:rPr lang="en-US" sz="2400" b="1" dirty="0">
                 <a:solidFill>
                   <a:schemeClr val="accent6">
                     <a:lumMod val="60000"/>
@@ -6217,7 +6474,29 @@
                   </a:schemeClr>
                 </a:solidFill>
               </a:rPr>
-              <a:t>While both RNNs and LSTMs are designed for processing sequential information, LSTMs use a more sophisticated architecture with "gates" to control the flow of information, allowing them to better remember (and forget) relevant information over long periods of time. </a:t>
+              <a:t>LSTMs use a more sophisticated architecture with "gates" to control the flow of information, allowing them to better </a:t>
+            </a:r>
+            <a:r>
+              <a:rPr lang="en-US" sz="2400" b="1" dirty="0">
+                <a:solidFill>
+                  <a:schemeClr val="accent6">
+                    <a:lumMod val="60000"/>
+                    <a:lumOff val="40000"/>
+                  </a:schemeClr>
+                </a:solidFill>
+              </a:rPr>
+              <a:t>remember (and forget)</a:t>
+            </a:r>
+            <a:r>
+              <a:rPr lang="en-US" sz="2400" dirty="0">
+                <a:solidFill>
+                  <a:schemeClr val="accent6">
+                    <a:lumMod val="60000"/>
+                    <a:lumOff val="40000"/>
+                  </a:schemeClr>
+                </a:solidFill>
+              </a:rPr>
+              <a:t> relevant information over long periods of time. </a:t>
             </a:r>
             <a:endParaRPr lang="en-IN" sz="2400" dirty="0">
               <a:solidFill>
@@ -6410,8 +6689,8 @@
           </a:p>
         </p:txBody>
       </p:sp>
-      <mc:AlternateContent xmlns:mc="http://schemas.openxmlformats.org/markup-compatibility/2006" xmlns:a14="http://schemas.microsoft.com/office/drawing/2010/main">
-        <mc:Choice Requires="a14">
+      <mc:AlternateContent xmlns:mc="http://schemas.openxmlformats.org/markup-compatibility/2006">
+        <mc:Choice xmlns:a14="http://schemas.microsoft.com/office/drawing/2010/main" Requires="a14">
           <p:sp>
             <p:nvSpPr>
               <p:cNvPr id="3" name="TextBox 2">
@@ -6426,8 +6705,8 @@
             </p:nvSpPr>
             <p:spPr>
               <a:xfrm>
-                <a:off x="2176272" y="4004361"/>
-                <a:ext cx="7027164" cy="1995033"/>
+                <a:off x="1764792" y="3519729"/>
+                <a:ext cx="8165592" cy="2785314"/>
               </a:xfrm>
               <a:prstGeom prst="rect">
                 <a:avLst/>
@@ -6460,364 +6739,772 @@
                   <a:buNone/>
                 </a:pPr>
                 <a14:m>
-                  <m:oMathPara xmlns:m="http://schemas.openxmlformats.org/officeDocument/2006/math">
-                    <m:oMathParaPr>
-                      <m:jc m:val="centerGroup"/>
-                    </m:oMathParaPr>
-                    <m:oMath xmlns:m="http://schemas.openxmlformats.org/officeDocument/2006/math">
-                      <m:sSub>
-                        <m:sSubPr>
-                          <m:ctrlPr>
-                            <a:rPr lang="ar-AE" sz="2400" i="1">
-                              <a:solidFill>
-                                <a:schemeClr val="accent6">
-                                  <a:lumMod val="60000"/>
-                                  <a:lumOff val="40000"/>
-                                </a:schemeClr>
-                              </a:solidFill>
-                              <a:latin typeface="Cambria Math" panose="02040503050406030204" pitchFamily="18" charset="0"/>
-                            </a:rPr>
-                          </m:ctrlPr>
-                        </m:sSubPr>
-                        <m:e>
-                          <m:r>
-                            <a:rPr lang="ar-AE" sz="2400" i="1">
-                              <a:solidFill>
-                                <a:schemeClr val="accent6">
-                                  <a:lumMod val="60000"/>
-                                  <a:lumOff val="40000"/>
-                                </a:schemeClr>
-                              </a:solidFill>
-                              <a:latin typeface="Cambria Math" panose="02040503050406030204" pitchFamily="18" charset="0"/>
-                            </a:rPr>
-                            <m:t>𝑓</m:t>
-                          </m:r>
-                        </m:e>
-                        <m:sub>
-                          <m:r>
-                            <a:rPr lang="ar-AE" sz="2400" i="1">
-                              <a:solidFill>
-                                <a:schemeClr val="accent6">
-                                  <a:lumMod val="60000"/>
-                                  <a:lumOff val="40000"/>
-                                </a:schemeClr>
-                              </a:solidFill>
-                              <a:latin typeface="Cambria Math" panose="02040503050406030204" pitchFamily="18" charset="0"/>
-                            </a:rPr>
-                            <m:t>𝑡</m:t>
-                          </m:r>
-                        </m:sub>
-                      </m:sSub>
-                      <m:r>
-                        <a:rPr lang="ar-AE" sz="2400" i="0">
-                          <a:solidFill>
-                            <a:schemeClr val="accent6">
-                              <a:lumMod val="60000"/>
-                              <a:lumOff val="40000"/>
-                            </a:schemeClr>
-                          </a:solidFill>
-                          <a:latin typeface="Cambria Math" panose="02040503050406030204" pitchFamily="18" charset="0"/>
-                        </a:rPr>
-                        <m:t>=</m:t>
-                      </m:r>
-                      <m:r>
-                        <a:rPr lang="ar-AE" sz="2400" i="1">
-                          <a:solidFill>
-                            <a:schemeClr val="accent6">
-                              <a:lumMod val="60000"/>
-                              <a:lumOff val="40000"/>
-                            </a:schemeClr>
-                          </a:solidFill>
-                          <a:latin typeface="Cambria Math" panose="02040503050406030204" pitchFamily="18" charset="0"/>
-                        </a:rPr>
-                        <m:t>𝜎</m:t>
-                      </m:r>
-                      <m:d>
-                        <m:dPr>
-                          <m:ctrlPr>
-                            <a:rPr lang="ar-AE" sz="2400" i="1">
-                              <a:solidFill>
-                                <a:schemeClr val="accent6">
-                                  <a:lumMod val="60000"/>
-                                  <a:lumOff val="40000"/>
-                                </a:schemeClr>
-                              </a:solidFill>
-                              <a:latin typeface="Cambria Math" panose="02040503050406030204" pitchFamily="18" charset="0"/>
-                            </a:rPr>
-                          </m:ctrlPr>
-                        </m:dPr>
-                        <m:e>
-                          <m:sSub>
-                            <m:sSubPr>
-                              <m:ctrlPr>
-                                <a:rPr lang="ar-AE" sz="2400" i="1">
-                                  <a:solidFill>
-                                    <a:schemeClr val="accent6">
-                                      <a:lumMod val="60000"/>
-                                      <a:lumOff val="40000"/>
-                                    </a:schemeClr>
-                                  </a:solidFill>
-                                  <a:latin typeface="Cambria Math" panose="02040503050406030204" pitchFamily="18" charset="0"/>
-                                </a:rPr>
-                              </m:ctrlPr>
-                            </m:sSubPr>
-                            <m:e>
-                              <m:r>
-                                <a:rPr lang="ar-AE" sz="2400" i="1">
-                                  <a:solidFill>
-                                    <a:schemeClr val="accent6">
-                                      <a:lumMod val="60000"/>
-                                      <a:lumOff val="40000"/>
-                                    </a:schemeClr>
-                                  </a:solidFill>
-                                  <a:latin typeface="Cambria Math" panose="02040503050406030204" pitchFamily="18" charset="0"/>
-                                </a:rPr>
-                                <m:t>𝑊</m:t>
-                              </m:r>
-                            </m:e>
-                            <m:sub>
-                              <m:r>
-                                <a:rPr lang="ar-AE" sz="2400" i="1">
-                                  <a:solidFill>
-                                    <a:schemeClr val="accent6">
-                                      <a:lumMod val="60000"/>
-                                      <a:lumOff val="40000"/>
-                                    </a:schemeClr>
-                                  </a:solidFill>
-                                  <a:latin typeface="Cambria Math" panose="02040503050406030204" pitchFamily="18" charset="0"/>
-                                </a:rPr>
-                                <m:t>𝑓</m:t>
-                              </m:r>
-                            </m:sub>
-                          </m:sSub>
-                          <m:r>
-                            <a:rPr lang="ar-AE" sz="2400" i="0">
-                              <a:solidFill>
-                                <a:schemeClr val="accent6">
-                                  <a:lumMod val="60000"/>
-                                  <a:lumOff val="40000"/>
-                                </a:schemeClr>
-                              </a:solidFill>
-                              <a:latin typeface="Cambria Math" panose="02040503050406030204" pitchFamily="18" charset="0"/>
-                            </a:rPr>
-                            <m:t>⋅</m:t>
-                          </m:r>
-                          <m:d>
-                            <m:dPr>
-                              <m:begChr m:val="["/>
-                              <m:endChr m:val="]"/>
-                              <m:sepChr m:val=","/>
-                              <m:ctrlPr>
-                                <a:rPr lang="ar-AE" sz="2400" i="1">
-                                  <a:solidFill>
-                                    <a:schemeClr val="accent6">
-                                      <a:lumMod val="60000"/>
-                                      <a:lumOff val="40000"/>
-                                    </a:schemeClr>
-                                  </a:solidFill>
-                                  <a:latin typeface="Cambria Math" panose="02040503050406030204" pitchFamily="18" charset="0"/>
-                                </a:rPr>
-                              </m:ctrlPr>
-                            </m:dPr>
-                            <m:e>
-                              <m:sSub>
-                                <m:sSubPr>
-                                  <m:ctrlPr>
-                                    <a:rPr lang="ar-AE" sz="2400" i="1">
-                                      <a:solidFill>
-                                        <a:schemeClr val="accent6">
-                                          <a:lumMod val="60000"/>
-                                          <a:lumOff val="40000"/>
-                                        </a:schemeClr>
-                                      </a:solidFill>
-                                      <a:latin typeface="Cambria Math" panose="02040503050406030204" pitchFamily="18" charset="0"/>
-                                    </a:rPr>
-                                  </m:ctrlPr>
-                                </m:sSubPr>
-                                <m:e>
-                                  <m:r>
-                                    <a:rPr lang="ar-AE" sz="2400" i="1">
-                                      <a:solidFill>
-                                        <a:schemeClr val="accent6">
-                                          <a:lumMod val="60000"/>
-                                          <a:lumOff val="40000"/>
-                                        </a:schemeClr>
-                                      </a:solidFill>
-                                      <a:latin typeface="Cambria Math" panose="02040503050406030204" pitchFamily="18" charset="0"/>
-                                    </a:rPr>
-                                    <m:t>h</m:t>
-                                  </m:r>
-                                </m:e>
-                                <m:sub>
-                                  <m:r>
-                                    <a:rPr lang="ar-AE" sz="2400" i="1">
-                                      <a:solidFill>
-                                        <a:schemeClr val="accent6">
-                                          <a:lumMod val="60000"/>
-                                          <a:lumOff val="40000"/>
-                                        </a:schemeClr>
-                                      </a:solidFill>
-                                      <a:latin typeface="Cambria Math" panose="02040503050406030204" pitchFamily="18" charset="0"/>
-                                    </a:rPr>
-                                    <m:t>𝑡</m:t>
-                                  </m:r>
-                                  <m:r>
-                                    <a:rPr lang="ar-AE" sz="2400" i="0">
-                                      <a:solidFill>
-                                        <a:schemeClr val="accent6">
-                                          <a:lumMod val="60000"/>
-                                          <a:lumOff val="40000"/>
-                                        </a:schemeClr>
-                                      </a:solidFill>
-                                      <a:latin typeface="Cambria Math" panose="02040503050406030204" pitchFamily="18" charset="0"/>
-                                    </a:rPr>
-                                    <m:t>−</m:t>
-                                  </m:r>
-                                  <m:r>
-                                    <a:rPr lang="ar-AE" sz="2400" i="0">
-                                      <a:solidFill>
-                                        <a:schemeClr val="accent6">
-                                          <a:lumMod val="60000"/>
-                                          <a:lumOff val="40000"/>
-                                        </a:schemeClr>
-                                      </a:solidFill>
-                                      <a:latin typeface="Cambria Math" panose="02040503050406030204" pitchFamily="18" charset="0"/>
-                                    </a:rPr>
-                                    <m:t>1</m:t>
-                                  </m:r>
-                                </m:sub>
-                              </m:sSub>
-                              <m:r>
-                                <a:rPr lang="en-US" sz="2400" b="0" i="1" smtClean="0">
-                                  <a:solidFill>
-                                    <a:schemeClr val="accent6">
-                                      <a:lumMod val="60000"/>
-                                      <a:lumOff val="40000"/>
-                                    </a:schemeClr>
-                                  </a:solidFill>
-                                  <a:latin typeface="Cambria Math" panose="02040503050406030204" pitchFamily="18" charset="0"/>
-                                </a:rPr>
-                                <m:t> </m:t>
-                              </m:r>
-                            </m:e>
-                            <m:e>
-                              <m:r>
-                                <a:rPr lang="en-US" sz="2400" b="0" i="1" smtClean="0">
-                                  <a:solidFill>
-                                    <a:schemeClr val="accent6">
-                                      <a:lumMod val="60000"/>
-                                      <a:lumOff val="40000"/>
-                                    </a:schemeClr>
-                                  </a:solidFill>
-                                  <a:latin typeface="Cambria Math" panose="02040503050406030204" pitchFamily="18" charset="0"/>
-                                </a:rPr>
-                                <m:t> </m:t>
-                              </m:r>
-                              <m:sSub>
-                                <m:sSubPr>
-                                  <m:ctrlPr>
-                                    <a:rPr lang="ar-AE" sz="2400" i="1">
-                                      <a:solidFill>
-                                        <a:schemeClr val="accent6">
-                                          <a:lumMod val="60000"/>
-                                          <a:lumOff val="40000"/>
-                                        </a:schemeClr>
-                                      </a:solidFill>
-                                      <a:latin typeface="Cambria Math" panose="02040503050406030204" pitchFamily="18" charset="0"/>
-                                    </a:rPr>
-                                  </m:ctrlPr>
-                                </m:sSubPr>
-                                <m:e>
-                                  <m:r>
-                                    <a:rPr lang="ar-AE" sz="2400" i="1">
-                                      <a:solidFill>
-                                        <a:schemeClr val="accent6">
-                                          <a:lumMod val="60000"/>
-                                          <a:lumOff val="40000"/>
-                                        </a:schemeClr>
-                                      </a:solidFill>
-                                      <a:latin typeface="Cambria Math" panose="02040503050406030204" pitchFamily="18" charset="0"/>
-                                    </a:rPr>
-                                    <m:t>𝑥</m:t>
-                                  </m:r>
-                                </m:e>
-                                <m:sub>
-                                  <m:r>
-                                    <a:rPr lang="ar-AE" sz="2400" i="1">
-                                      <a:solidFill>
-                                        <a:schemeClr val="accent6">
-                                          <a:lumMod val="60000"/>
-                                          <a:lumOff val="40000"/>
-                                        </a:schemeClr>
-                                      </a:solidFill>
-                                      <a:latin typeface="Cambria Math" panose="02040503050406030204" pitchFamily="18" charset="0"/>
-                                    </a:rPr>
-                                    <m:t>𝑡</m:t>
-                                  </m:r>
-                                </m:sub>
-                              </m:sSub>
-                            </m:e>
-                          </m:d>
-                          <m:r>
-                            <a:rPr lang="ar-AE" sz="2400" i="0">
-                              <a:solidFill>
-                                <a:schemeClr val="accent6">
-                                  <a:lumMod val="60000"/>
-                                  <a:lumOff val="40000"/>
-                                </a:schemeClr>
-                              </a:solidFill>
-                              <a:latin typeface="Cambria Math" panose="02040503050406030204" pitchFamily="18" charset="0"/>
-                            </a:rPr>
-                            <m:t>+</m:t>
-                          </m:r>
-                          <m:sSub>
-                            <m:sSubPr>
-                              <m:ctrlPr>
-                                <a:rPr lang="ar-AE" sz="2400" i="1">
-                                  <a:solidFill>
-                                    <a:schemeClr val="accent6">
-                                      <a:lumMod val="60000"/>
-                                      <a:lumOff val="40000"/>
-                                    </a:schemeClr>
-                                  </a:solidFill>
-                                  <a:latin typeface="Cambria Math" panose="02040503050406030204" pitchFamily="18" charset="0"/>
-                                </a:rPr>
-                              </m:ctrlPr>
-                            </m:sSubPr>
-                            <m:e>
-                              <m:r>
-                                <a:rPr lang="ar-AE" sz="2400" i="1">
-                                  <a:solidFill>
-                                    <a:schemeClr val="accent6">
-                                      <a:lumMod val="60000"/>
-                                      <a:lumOff val="40000"/>
-                                    </a:schemeClr>
-                                  </a:solidFill>
-                                  <a:latin typeface="Cambria Math" panose="02040503050406030204" pitchFamily="18" charset="0"/>
-                                </a:rPr>
-                                <m:t>𝑏</m:t>
-                              </m:r>
-                            </m:e>
-                            <m:sub>
-                              <m:r>
-                                <a:rPr lang="ar-AE" sz="2400" i="1">
-                                  <a:solidFill>
-                                    <a:schemeClr val="accent6">
-                                      <a:lumMod val="60000"/>
-                                      <a:lumOff val="40000"/>
-                                    </a:schemeClr>
-                                  </a:solidFill>
-                                  <a:latin typeface="Cambria Math" panose="02040503050406030204" pitchFamily="18" charset="0"/>
-                                </a:rPr>
-                                <m:t>𝑓</m:t>
-                              </m:r>
-                            </m:sub>
-                          </m:sSub>
-                        </m:e>
-                      </m:d>
-                    </m:oMath>
-                  </m:oMathPara>
+                  <m:oMath xmlns:m="http://schemas.openxmlformats.org/officeDocument/2006/math">
+                    <m:sSub>
+                      <m:sSubPr>
+                        <m:ctrlPr>
+                          <a:rPr lang="ar-AE" sz="2400" b="1" i="1">
+                            <a:solidFill>
+                              <a:schemeClr val="accent6">
+                                <a:lumMod val="60000"/>
+                                <a:lumOff val="40000"/>
+                              </a:schemeClr>
+                            </a:solidFill>
+                            <a:latin typeface="Cambria Math" panose="02040503050406030204" pitchFamily="18" charset="0"/>
+                          </a:rPr>
+                        </m:ctrlPr>
+                      </m:sSubPr>
+                      <m:e>
+                        <m:r>
+                          <a:rPr lang="ar-AE" sz="2400" b="1" i="1">
+                            <a:solidFill>
+                              <a:schemeClr val="accent6">
+                                <a:lumMod val="60000"/>
+                                <a:lumOff val="40000"/>
+                              </a:schemeClr>
+                            </a:solidFill>
+                            <a:latin typeface="Cambria Math" panose="02040503050406030204" pitchFamily="18" charset="0"/>
+                          </a:rPr>
+                          <m:t>𝒇</m:t>
+                        </m:r>
+                      </m:e>
+                      <m:sub>
+                        <m:r>
+                          <a:rPr lang="ar-AE" sz="2400" b="1" i="1">
+                            <a:solidFill>
+                              <a:schemeClr val="accent6">
+                                <a:lumMod val="60000"/>
+                                <a:lumOff val="40000"/>
+                              </a:schemeClr>
+                            </a:solidFill>
+                            <a:latin typeface="Cambria Math" panose="02040503050406030204" pitchFamily="18" charset="0"/>
+                          </a:rPr>
+                          <m:t>𝒕</m:t>
+                        </m:r>
+                      </m:sub>
+                    </m:sSub>
+                    <m:r>
+                      <a:rPr lang="ar-AE" sz="2400" b="1" i="0">
+                        <a:solidFill>
+                          <a:schemeClr val="accent6">
+                            <a:lumMod val="60000"/>
+                            <a:lumOff val="40000"/>
+                          </a:schemeClr>
+                        </a:solidFill>
+                        <a:latin typeface="Cambria Math" panose="02040503050406030204" pitchFamily="18" charset="0"/>
+                      </a:rPr>
+                      <m:t>=</m:t>
+                    </m:r>
+                    <m:r>
+                      <a:rPr lang="ar-AE" sz="2400" b="1" i="1">
+                        <a:solidFill>
+                          <a:schemeClr val="accent6">
+                            <a:lumMod val="60000"/>
+                            <a:lumOff val="40000"/>
+                          </a:schemeClr>
+                        </a:solidFill>
+                        <a:latin typeface="Cambria Math" panose="02040503050406030204" pitchFamily="18" charset="0"/>
+                      </a:rPr>
+                      <m:t>𝝈</m:t>
+                    </m:r>
+                    <m:d>
+                      <m:dPr>
+                        <m:ctrlPr>
+                          <a:rPr lang="ar-AE" sz="2400" b="1" i="1">
+                            <a:solidFill>
+                              <a:schemeClr val="accent6">
+                                <a:lumMod val="60000"/>
+                                <a:lumOff val="40000"/>
+                              </a:schemeClr>
+                            </a:solidFill>
+                            <a:latin typeface="Cambria Math" panose="02040503050406030204" pitchFamily="18" charset="0"/>
+                          </a:rPr>
+                        </m:ctrlPr>
+                      </m:dPr>
+                      <m:e>
+                        <m:sSub>
+                          <m:sSubPr>
+                            <m:ctrlPr>
+                              <a:rPr lang="ar-AE" sz="2400" b="1" i="1">
+                                <a:solidFill>
+                                  <a:schemeClr val="accent6">
+                                    <a:lumMod val="60000"/>
+                                    <a:lumOff val="40000"/>
+                                  </a:schemeClr>
+                                </a:solidFill>
+                                <a:latin typeface="Cambria Math" panose="02040503050406030204" pitchFamily="18" charset="0"/>
+                              </a:rPr>
+                            </m:ctrlPr>
+                          </m:sSubPr>
+                          <m:e>
+                            <m:r>
+                              <a:rPr lang="ar-AE" sz="2400" b="1" i="1">
+                                <a:solidFill>
+                                  <a:schemeClr val="accent6">
+                                    <a:lumMod val="60000"/>
+                                    <a:lumOff val="40000"/>
+                                  </a:schemeClr>
+                                </a:solidFill>
+                                <a:latin typeface="Cambria Math" panose="02040503050406030204" pitchFamily="18" charset="0"/>
+                              </a:rPr>
+                              <m:t>𝑾</m:t>
+                            </m:r>
+                          </m:e>
+                          <m:sub>
+                            <m:r>
+                              <a:rPr lang="ar-AE" sz="2400" b="1" i="1">
+                                <a:solidFill>
+                                  <a:schemeClr val="accent6">
+                                    <a:lumMod val="60000"/>
+                                    <a:lumOff val="40000"/>
+                                  </a:schemeClr>
+                                </a:solidFill>
+                                <a:latin typeface="Cambria Math" panose="02040503050406030204" pitchFamily="18" charset="0"/>
+                              </a:rPr>
+                              <m:t>𝒇</m:t>
+                            </m:r>
+                          </m:sub>
+                        </m:sSub>
+                        <m:r>
+                          <a:rPr lang="ar-AE" sz="2400" b="1" i="0">
+                            <a:solidFill>
+                              <a:schemeClr val="accent6">
+                                <a:lumMod val="60000"/>
+                                <a:lumOff val="40000"/>
+                              </a:schemeClr>
+                            </a:solidFill>
+                            <a:latin typeface="Cambria Math" panose="02040503050406030204" pitchFamily="18" charset="0"/>
+                          </a:rPr>
+                          <m:t>⋅</m:t>
+                        </m:r>
+                        <m:d>
+                          <m:dPr>
+                            <m:begChr m:val="["/>
+                            <m:endChr m:val="]"/>
+                            <m:sepChr m:val=","/>
+                            <m:ctrlPr>
+                              <a:rPr lang="ar-AE" sz="2400" b="1" i="1">
+                                <a:solidFill>
+                                  <a:schemeClr val="accent6">
+                                    <a:lumMod val="60000"/>
+                                    <a:lumOff val="40000"/>
+                                  </a:schemeClr>
+                                </a:solidFill>
+                                <a:latin typeface="Cambria Math" panose="02040503050406030204" pitchFamily="18" charset="0"/>
+                              </a:rPr>
+                            </m:ctrlPr>
+                          </m:dPr>
+                          <m:e>
+                            <m:sSub>
+                              <m:sSubPr>
+                                <m:ctrlPr>
+                                  <a:rPr lang="ar-AE" sz="2400" b="1" i="1">
+                                    <a:solidFill>
+                                      <a:schemeClr val="accent6">
+                                        <a:lumMod val="60000"/>
+                                        <a:lumOff val="40000"/>
+                                      </a:schemeClr>
+                                    </a:solidFill>
+                                    <a:latin typeface="Cambria Math" panose="02040503050406030204" pitchFamily="18" charset="0"/>
+                                  </a:rPr>
+                                </m:ctrlPr>
+                              </m:sSubPr>
+                              <m:e>
+                                <m:r>
+                                  <a:rPr lang="ar-AE" sz="2400" b="1" i="1">
+                                    <a:solidFill>
+                                      <a:schemeClr val="accent6">
+                                        <a:lumMod val="60000"/>
+                                        <a:lumOff val="40000"/>
+                                      </a:schemeClr>
+                                    </a:solidFill>
+                                    <a:latin typeface="Cambria Math" panose="02040503050406030204" pitchFamily="18" charset="0"/>
+                                  </a:rPr>
+                                  <m:t>𝒉</m:t>
+                                </m:r>
+                              </m:e>
+                              <m:sub>
+                                <m:r>
+                                  <a:rPr lang="ar-AE" sz="2400" b="1" i="1">
+                                    <a:solidFill>
+                                      <a:schemeClr val="accent6">
+                                        <a:lumMod val="60000"/>
+                                        <a:lumOff val="40000"/>
+                                      </a:schemeClr>
+                                    </a:solidFill>
+                                    <a:latin typeface="Cambria Math" panose="02040503050406030204" pitchFamily="18" charset="0"/>
+                                  </a:rPr>
+                                  <m:t>𝒕</m:t>
+                                </m:r>
+                                <m:r>
+                                  <a:rPr lang="ar-AE" sz="2400" b="1" i="0">
+                                    <a:solidFill>
+                                      <a:schemeClr val="accent6">
+                                        <a:lumMod val="60000"/>
+                                        <a:lumOff val="40000"/>
+                                      </a:schemeClr>
+                                    </a:solidFill>
+                                    <a:latin typeface="Cambria Math" panose="02040503050406030204" pitchFamily="18" charset="0"/>
+                                  </a:rPr>
+                                  <m:t>−</m:t>
+                                </m:r>
+                                <m:r>
+                                  <a:rPr lang="ar-AE" sz="2400" b="1" i="0">
+                                    <a:solidFill>
+                                      <a:schemeClr val="accent6">
+                                        <a:lumMod val="60000"/>
+                                        <a:lumOff val="40000"/>
+                                      </a:schemeClr>
+                                    </a:solidFill>
+                                    <a:latin typeface="Cambria Math" panose="02040503050406030204" pitchFamily="18" charset="0"/>
+                                  </a:rPr>
+                                  <m:t>𝟏</m:t>
+                                </m:r>
+                              </m:sub>
+                            </m:sSub>
+                            <m:r>
+                              <a:rPr lang="en-US" sz="2400" b="1" i="1" smtClean="0">
+                                <a:solidFill>
+                                  <a:schemeClr val="accent6">
+                                    <a:lumMod val="60000"/>
+                                    <a:lumOff val="40000"/>
+                                  </a:schemeClr>
+                                </a:solidFill>
+                                <a:latin typeface="Cambria Math" panose="02040503050406030204" pitchFamily="18" charset="0"/>
+                              </a:rPr>
+                              <m:t> </m:t>
+                            </m:r>
+                          </m:e>
+                          <m:e>
+                            <m:r>
+                              <a:rPr lang="en-US" sz="2400" b="1" i="1" smtClean="0">
+                                <a:solidFill>
+                                  <a:schemeClr val="accent6">
+                                    <a:lumMod val="60000"/>
+                                    <a:lumOff val="40000"/>
+                                  </a:schemeClr>
+                                </a:solidFill>
+                                <a:latin typeface="Cambria Math" panose="02040503050406030204" pitchFamily="18" charset="0"/>
+                              </a:rPr>
+                              <m:t> </m:t>
+                            </m:r>
+                            <m:sSub>
+                              <m:sSubPr>
+                                <m:ctrlPr>
+                                  <a:rPr lang="ar-AE" sz="2400" b="1" i="1">
+                                    <a:solidFill>
+                                      <a:schemeClr val="accent6">
+                                        <a:lumMod val="60000"/>
+                                        <a:lumOff val="40000"/>
+                                      </a:schemeClr>
+                                    </a:solidFill>
+                                    <a:latin typeface="Cambria Math" panose="02040503050406030204" pitchFamily="18" charset="0"/>
+                                  </a:rPr>
+                                </m:ctrlPr>
+                              </m:sSubPr>
+                              <m:e>
+                                <m:r>
+                                  <a:rPr lang="ar-AE" sz="2400" b="1" i="1">
+                                    <a:solidFill>
+                                      <a:schemeClr val="accent6">
+                                        <a:lumMod val="60000"/>
+                                        <a:lumOff val="40000"/>
+                                      </a:schemeClr>
+                                    </a:solidFill>
+                                    <a:latin typeface="Cambria Math" panose="02040503050406030204" pitchFamily="18" charset="0"/>
+                                  </a:rPr>
+                                  <m:t>𝒙</m:t>
+                                </m:r>
+                              </m:e>
+                              <m:sub>
+                                <m:r>
+                                  <a:rPr lang="ar-AE" sz="2400" b="1" i="1">
+                                    <a:solidFill>
+                                      <a:schemeClr val="accent6">
+                                        <a:lumMod val="60000"/>
+                                        <a:lumOff val="40000"/>
+                                      </a:schemeClr>
+                                    </a:solidFill>
+                                    <a:latin typeface="Cambria Math" panose="02040503050406030204" pitchFamily="18" charset="0"/>
+                                  </a:rPr>
+                                  <m:t>𝒕</m:t>
+                                </m:r>
+                              </m:sub>
+                            </m:sSub>
+                          </m:e>
+                        </m:d>
+                        <m:r>
+                          <a:rPr lang="ar-AE" sz="2400" b="1" i="0">
+                            <a:solidFill>
+                              <a:schemeClr val="accent6">
+                                <a:lumMod val="60000"/>
+                                <a:lumOff val="40000"/>
+                              </a:schemeClr>
+                            </a:solidFill>
+                            <a:latin typeface="Cambria Math" panose="02040503050406030204" pitchFamily="18" charset="0"/>
+                          </a:rPr>
+                          <m:t>+</m:t>
+                        </m:r>
+                        <m:sSub>
+                          <m:sSubPr>
+                            <m:ctrlPr>
+                              <a:rPr lang="ar-AE" sz="2400" b="1" i="1">
+                                <a:solidFill>
+                                  <a:schemeClr val="accent6">
+                                    <a:lumMod val="60000"/>
+                                    <a:lumOff val="40000"/>
+                                  </a:schemeClr>
+                                </a:solidFill>
+                                <a:latin typeface="Cambria Math" panose="02040503050406030204" pitchFamily="18" charset="0"/>
+                              </a:rPr>
+                            </m:ctrlPr>
+                          </m:sSubPr>
+                          <m:e>
+                            <m:r>
+                              <a:rPr lang="ar-AE" sz="2400" b="1" i="1">
+                                <a:solidFill>
+                                  <a:schemeClr val="accent6">
+                                    <a:lumMod val="60000"/>
+                                    <a:lumOff val="40000"/>
+                                  </a:schemeClr>
+                                </a:solidFill>
+                                <a:latin typeface="Cambria Math" panose="02040503050406030204" pitchFamily="18" charset="0"/>
+                              </a:rPr>
+                              <m:t>𝒃</m:t>
+                            </m:r>
+                          </m:e>
+                          <m:sub>
+                            <m:r>
+                              <a:rPr lang="ar-AE" sz="2400" b="1" i="1">
+                                <a:solidFill>
+                                  <a:schemeClr val="accent6">
+                                    <a:lumMod val="60000"/>
+                                    <a:lumOff val="40000"/>
+                                  </a:schemeClr>
+                                </a:solidFill>
+                                <a:latin typeface="Cambria Math" panose="02040503050406030204" pitchFamily="18" charset="0"/>
+                              </a:rPr>
+                              <m:t>𝒇</m:t>
+                            </m:r>
+                          </m:sub>
+                        </m:sSub>
+                      </m:e>
+                    </m:d>
+                  </m:oMath>
                 </a14:m>
+                <a:r>
+                  <a:rPr lang="en-US" sz="2400" b="1" dirty="0">
+                    <a:solidFill>
+                      <a:schemeClr val="accent6">
+                        <a:lumMod val="60000"/>
+                        <a:lumOff val="40000"/>
+                      </a:schemeClr>
+                    </a:solidFill>
+                  </a:rPr>
+                  <a:t>    </a:t>
+                </a:r>
+                <a:r>
+                  <a:rPr lang="en-US" sz="2400" dirty="0">
+                    <a:solidFill>
+                      <a:schemeClr val="accent6">
+                        <a:lumMod val="60000"/>
+                        <a:lumOff val="40000"/>
+                      </a:schemeClr>
+                    </a:solidFill>
+                  </a:rPr>
+                  <a:t>-&gt; forget gate equation</a:t>
+                </a:r>
+                <a:endParaRPr lang="ar-AE" sz="2400" dirty="0">
+                  <a:solidFill>
+                    <a:schemeClr val="accent6">
+                      <a:lumMod val="60000"/>
+                      <a:lumOff val="40000"/>
+                    </a:schemeClr>
+                  </a:solidFill>
+                </a:endParaRPr>
+              </a:p>
+              <a:p>
+                <a:pPr>
+                  <a:buNone/>
+                </a:pPr>
+                <a:endParaRPr lang="en-US" sz="2400" b="1" i="1" dirty="0">
+                  <a:solidFill>
+                    <a:schemeClr val="accent6">
+                      <a:lumMod val="60000"/>
+                      <a:lumOff val="40000"/>
+                    </a:schemeClr>
+                  </a:solidFill>
+                  <a:latin typeface="Cambria Math" panose="02040503050406030204" pitchFamily="18" charset="0"/>
+                </a:endParaRPr>
+              </a:p>
+              <a:p>
+                <a:pPr>
+                  <a:buNone/>
+                </a:pPr>
+                <a14:m>
+                  <m:oMath xmlns:m="http://schemas.openxmlformats.org/officeDocument/2006/math">
+                    <m:sSub>
+                      <m:sSubPr>
+                        <m:ctrlPr>
+                          <a:rPr lang="ar-AE" sz="2400" b="1" i="1">
+                            <a:solidFill>
+                              <a:schemeClr val="accent6">
+                                <a:lumMod val="60000"/>
+                                <a:lumOff val="40000"/>
+                              </a:schemeClr>
+                            </a:solidFill>
+                            <a:latin typeface="Cambria Math" panose="02040503050406030204" pitchFamily="18" charset="0"/>
+                          </a:rPr>
+                        </m:ctrlPr>
+                      </m:sSubPr>
+                      <m:e>
+                        <m:r>
+                          <a:rPr lang="ar-AE" sz="2400" b="1" i="1">
+                            <a:solidFill>
+                              <a:schemeClr val="accent6">
+                                <a:lumMod val="60000"/>
+                                <a:lumOff val="40000"/>
+                              </a:schemeClr>
+                            </a:solidFill>
+                            <a:latin typeface="Cambria Math" panose="02040503050406030204" pitchFamily="18" charset="0"/>
+                          </a:rPr>
+                          <m:t>𝒊</m:t>
+                        </m:r>
+                      </m:e>
+                      <m:sub>
+                        <m:r>
+                          <a:rPr lang="ar-AE" sz="2400" b="1" i="1">
+                            <a:solidFill>
+                              <a:schemeClr val="accent6">
+                                <a:lumMod val="60000"/>
+                                <a:lumOff val="40000"/>
+                              </a:schemeClr>
+                            </a:solidFill>
+                            <a:latin typeface="Cambria Math" panose="02040503050406030204" pitchFamily="18" charset="0"/>
+                          </a:rPr>
+                          <m:t>𝒕</m:t>
+                        </m:r>
+                      </m:sub>
+                    </m:sSub>
+                    <m:r>
+                      <a:rPr lang="ar-AE" sz="2400" b="1" i="0">
+                        <a:solidFill>
+                          <a:schemeClr val="accent6">
+                            <a:lumMod val="60000"/>
+                            <a:lumOff val="40000"/>
+                          </a:schemeClr>
+                        </a:solidFill>
+                        <a:latin typeface="Cambria Math" panose="02040503050406030204" pitchFamily="18" charset="0"/>
+                      </a:rPr>
+                      <m:t>=</m:t>
+                    </m:r>
+                    <m:r>
+                      <a:rPr lang="ar-AE" sz="2400" b="1" i="1">
+                        <a:solidFill>
+                          <a:schemeClr val="accent6">
+                            <a:lumMod val="60000"/>
+                            <a:lumOff val="40000"/>
+                          </a:schemeClr>
+                        </a:solidFill>
+                        <a:latin typeface="Cambria Math" panose="02040503050406030204" pitchFamily="18" charset="0"/>
+                      </a:rPr>
+                      <m:t>𝝈</m:t>
+                    </m:r>
+                    <m:d>
+                      <m:dPr>
+                        <m:ctrlPr>
+                          <a:rPr lang="ar-AE" sz="2400" b="1" i="1">
+                            <a:solidFill>
+                              <a:schemeClr val="accent6">
+                                <a:lumMod val="60000"/>
+                                <a:lumOff val="40000"/>
+                              </a:schemeClr>
+                            </a:solidFill>
+                            <a:latin typeface="Cambria Math" panose="02040503050406030204" pitchFamily="18" charset="0"/>
+                          </a:rPr>
+                        </m:ctrlPr>
+                      </m:dPr>
+                      <m:e>
+                        <m:sSub>
+                          <m:sSubPr>
+                            <m:ctrlPr>
+                              <a:rPr lang="ar-AE" sz="2400" b="1" i="1">
+                                <a:solidFill>
+                                  <a:schemeClr val="accent6">
+                                    <a:lumMod val="60000"/>
+                                    <a:lumOff val="40000"/>
+                                  </a:schemeClr>
+                                </a:solidFill>
+                                <a:latin typeface="Cambria Math" panose="02040503050406030204" pitchFamily="18" charset="0"/>
+                              </a:rPr>
+                            </m:ctrlPr>
+                          </m:sSubPr>
+                          <m:e>
+                            <m:r>
+                              <a:rPr lang="ar-AE" sz="2400" b="1" i="1">
+                                <a:solidFill>
+                                  <a:schemeClr val="accent6">
+                                    <a:lumMod val="60000"/>
+                                    <a:lumOff val="40000"/>
+                                  </a:schemeClr>
+                                </a:solidFill>
+                                <a:latin typeface="Cambria Math" panose="02040503050406030204" pitchFamily="18" charset="0"/>
+                              </a:rPr>
+                              <m:t>𝑾</m:t>
+                            </m:r>
+                          </m:e>
+                          <m:sub>
+                            <m:r>
+                              <a:rPr lang="ar-AE" sz="2400" b="1" i="1">
+                                <a:solidFill>
+                                  <a:schemeClr val="accent6">
+                                    <a:lumMod val="60000"/>
+                                    <a:lumOff val="40000"/>
+                                  </a:schemeClr>
+                                </a:solidFill>
+                                <a:latin typeface="Cambria Math" panose="02040503050406030204" pitchFamily="18" charset="0"/>
+                              </a:rPr>
+                              <m:t>𝒊</m:t>
+                            </m:r>
+                          </m:sub>
+                        </m:sSub>
+                        <m:d>
+                          <m:dPr>
+                            <m:begChr m:val="["/>
+                            <m:endChr m:val="]"/>
+                            <m:sepChr m:val=","/>
+                            <m:ctrlPr>
+                              <a:rPr lang="ar-AE" sz="2400" b="1" i="1" smtClean="0">
+                                <a:solidFill>
+                                  <a:schemeClr val="accent6">
+                                    <a:lumMod val="60000"/>
+                                    <a:lumOff val="40000"/>
+                                  </a:schemeClr>
+                                </a:solidFill>
+                                <a:latin typeface="Cambria Math" panose="02040503050406030204" pitchFamily="18" charset="0"/>
+                              </a:rPr>
+                            </m:ctrlPr>
+                          </m:dPr>
+                          <m:e>
+                            <m:sSub>
+                              <m:sSubPr>
+                                <m:ctrlPr>
+                                  <a:rPr lang="ar-AE" sz="2400" b="1" i="1">
+                                    <a:solidFill>
+                                      <a:schemeClr val="accent6">
+                                        <a:lumMod val="60000"/>
+                                        <a:lumOff val="40000"/>
+                                      </a:schemeClr>
+                                    </a:solidFill>
+                                    <a:latin typeface="Cambria Math" panose="02040503050406030204" pitchFamily="18" charset="0"/>
+                                  </a:rPr>
+                                </m:ctrlPr>
+                              </m:sSubPr>
+                              <m:e>
+                                <m:r>
+                                  <a:rPr lang="ar-AE" sz="2400" b="1" i="1">
+                                    <a:solidFill>
+                                      <a:schemeClr val="accent6">
+                                        <a:lumMod val="60000"/>
+                                        <a:lumOff val="40000"/>
+                                      </a:schemeClr>
+                                    </a:solidFill>
+                                    <a:latin typeface="Cambria Math" panose="02040503050406030204" pitchFamily="18" charset="0"/>
+                                  </a:rPr>
+                                  <m:t>𝒉</m:t>
+                                </m:r>
+                              </m:e>
+                              <m:sub>
+                                <m:r>
+                                  <a:rPr lang="ar-AE" sz="2400" b="1" i="1">
+                                    <a:solidFill>
+                                      <a:schemeClr val="accent6">
+                                        <a:lumMod val="60000"/>
+                                        <a:lumOff val="40000"/>
+                                      </a:schemeClr>
+                                    </a:solidFill>
+                                    <a:latin typeface="Cambria Math" panose="02040503050406030204" pitchFamily="18" charset="0"/>
+                                  </a:rPr>
+                                  <m:t>𝒕</m:t>
+                                </m:r>
+                                <m:r>
+                                  <a:rPr lang="ar-AE" sz="2400" b="1" i="0">
+                                    <a:solidFill>
+                                      <a:schemeClr val="accent6">
+                                        <a:lumMod val="60000"/>
+                                        <a:lumOff val="40000"/>
+                                      </a:schemeClr>
+                                    </a:solidFill>
+                                    <a:latin typeface="Cambria Math" panose="02040503050406030204" pitchFamily="18" charset="0"/>
+                                  </a:rPr>
+                                  <m:t>−</m:t>
+                                </m:r>
+                                <m:r>
+                                  <a:rPr lang="ar-AE" sz="2400" b="1" i="0">
+                                    <a:solidFill>
+                                      <a:schemeClr val="accent6">
+                                        <a:lumMod val="60000"/>
+                                        <a:lumOff val="40000"/>
+                                      </a:schemeClr>
+                                    </a:solidFill>
+                                    <a:latin typeface="Cambria Math" panose="02040503050406030204" pitchFamily="18" charset="0"/>
+                                  </a:rPr>
+                                  <m:t>𝟏</m:t>
+                                </m:r>
+                              </m:sub>
+                            </m:sSub>
+                            <m:r>
+                              <a:rPr lang="en-US" sz="2400" b="1" i="1" smtClean="0">
+                                <a:solidFill>
+                                  <a:schemeClr val="accent6">
+                                    <a:lumMod val="60000"/>
+                                    <a:lumOff val="40000"/>
+                                  </a:schemeClr>
+                                </a:solidFill>
+                                <a:latin typeface="Cambria Math" panose="02040503050406030204" pitchFamily="18" charset="0"/>
+                              </a:rPr>
+                              <m:t> </m:t>
+                            </m:r>
+                          </m:e>
+                          <m:e>
+                            <m:sSub>
+                              <m:sSubPr>
+                                <m:ctrlPr>
+                                  <a:rPr lang="ar-AE" sz="2400" b="1" i="1">
+                                    <a:solidFill>
+                                      <a:schemeClr val="accent6">
+                                        <a:lumMod val="60000"/>
+                                        <a:lumOff val="40000"/>
+                                      </a:schemeClr>
+                                    </a:solidFill>
+                                    <a:latin typeface="Cambria Math" panose="02040503050406030204" pitchFamily="18" charset="0"/>
+                                  </a:rPr>
+                                </m:ctrlPr>
+                              </m:sSubPr>
+                              <m:e>
+                                <m:r>
+                                  <a:rPr lang="en-US" sz="2400" b="1" i="1" smtClean="0">
+                                    <a:solidFill>
+                                      <a:schemeClr val="accent6">
+                                        <a:lumMod val="60000"/>
+                                        <a:lumOff val="40000"/>
+                                      </a:schemeClr>
+                                    </a:solidFill>
+                                    <a:latin typeface="Cambria Math" panose="02040503050406030204" pitchFamily="18" charset="0"/>
+                                  </a:rPr>
+                                  <m:t> </m:t>
+                                </m:r>
+                                <m:r>
+                                  <a:rPr lang="ar-AE" sz="2400" b="1" i="1">
+                                    <a:solidFill>
+                                      <a:schemeClr val="accent6">
+                                        <a:lumMod val="60000"/>
+                                        <a:lumOff val="40000"/>
+                                      </a:schemeClr>
+                                    </a:solidFill>
+                                    <a:latin typeface="Cambria Math" panose="02040503050406030204" pitchFamily="18" charset="0"/>
+                                  </a:rPr>
+                                  <m:t>𝒙</m:t>
+                                </m:r>
+                              </m:e>
+                              <m:sub>
+                                <m:r>
+                                  <a:rPr lang="ar-AE" sz="2400" b="1" i="1">
+                                    <a:solidFill>
+                                      <a:schemeClr val="accent6">
+                                        <a:lumMod val="60000"/>
+                                        <a:lumOff val="40000"/>
+                                      </a:schemeClr>
+                                    </a:solidFill>
+                                    <a:latin typeface="Cambria Math" panose="02040503050406030204" pitchFamily="18" charset="0"/>
+                                  </a:rPr>
+                                  <m:t>𝒕</m:t>
+                                </m:r>
+                              </m:sub>
+                            </m:sSub>
+                          </m:e>
+                        </m:d>
+                        <m:r>
+                          <a:rPr lang="ar-AE" sz="2400" b="1" i="0">
+                            <a:solidFill>
+                              <a:schemeClr val="accent6">
+                                <a:lumMod val="60000"/>
+                                <a:lumOff val="40000"/>
+                              </a:schemeClr>
+                            </a:solidFill>
+                            <a:latin typeface="Cambria Math" panose="02040503050406030204" pitchFamily="18" charset="0"/>
+                          </a:rPr>
+                          <m:t>+</m:t>
+                        </m:r>
+                        <m:sSub>
+                          <m:sSubPr>
+                            <m:ctrlPr>
+                              <a:rPr lang="ar-AE" sz="2400" b="1" i="1">
+                                <a:solidFill>
+                                  <a:schemeClr val="accent6">
+                                    <a:lumMod val="60000"/>
+                                    <a:lumOff val="40000"/>
+                                  </a:schemeClr>
+                                </a:solidFill>
+                                <a:latin typeface="Cambria Math" panose="02040503050406030204" pitchFamily="18" charset="0"/>
+                              </a:rPr>
+                            </m:ctrlPr>
+                          </m:sSubPr>
+                          <m:e>
+                            <m:r>
+                              <a:rPr lang="ar-AE" sz="2400" b="1" i="1">
+                                <a:solidFill>
+                                  <a:schemeClr val="accent6">
+                                    <a:lumMod val="60000"/>
+                                    <a:lumOff val="40000"/>
+                                  </a:schemeClr>
+                                </a:solidFill>
+                                <a:latin typeface="Cambria Math" panose="02040503050406030204" pitchFamily="18" charset="0"/>
+                              </a:rPr>
+                              <m:t>𝒃</m:t>
+                            </m:r>
+                          </m:e>
+                          <m:sub>
+                            <m:r>
+                              <a:rPr lang="ar-AE" sz="2400" b="1" i="1">
+                                <a:solidFill>
+                                  <a:schemeClr val="accent6">
+                                    <a:lumMod val="60000"/>
+                                    <a:lumOff val="40000"/>
+                                  </a:schemeClr>
+                                </a:solidFill>
+                                <a:latin typeface="Cambria Math" panose="02040503050406030204" pitchFamily="18" charset="0"/>
+                              </a:rPr>
+                              <m:t>𝒊</m:t>
+                            </m:r>
+                          </m:sub>
+                        </m:sSub>
+                      </m:e>
+                    </m:d>
+                  </m:oMath>
+                </a14:m>
+                <a:r>
+                  <a:rPr lang="en-US" sz="2400" b="1" dirty="0">
+                    <a:solidFill>
+                      <a:schemeClr val="accent6">
+                        <a:lumMod val="60000"/>
+                        <a:lumOff val="40000"/>
+                      </a:schemeClr>
+                    </a:solidFill>
+                  </a:rPr>
+                  <a:t>          </a:t>
+                </a:r>
+                <a:r>
+                  <a:rPr lang="en-US" sz="2400" dirty="0">
+                    <a:solidFill>
+                      <a:schemeClr val="accent6">
+                        <a:lumMod val="60000"/>
+                        <a:lumOff val="40000"/>
+                      </a:schemeClr>
+                    </a:solidFill>
+                  </a:rPr>
+                  <a:t>-&gt; input gate equation</a:t>
+                </a:r>
                 <a:endParaRPr lang="ar-AE" sz="2400" dirty="0">
                   <a:solidFill>
                     <a:schemeClr val="accent6">
@@ -6832,353 +7519,342 @@
                   <a:buNone/>
                 </a:pPr>
                 <a14:m>
-                  <m:oMathPara xmlns:m="http://schemas.openxmlformats.org/officeDocument/2006/math">
-                    <m:oMathParaPr>
-                      <m:jc m:val="centerGroup"/>
-                    </m:oMathParaPr>
-                    <m:oMath xmlns:m="http://schemas.openxmlformats.org/officeDocument/2006/math">
-                      <m:sSub>
-                        <m:sSubPr>
-                          <m:ctrlPr>
-                            <a:rPr lang="ar-AE" sz="2400" i="1">
-                              <a:solidFill>
-                                <a:schemeClr val="accent6">
-                                  <a:lumMod val="60000"/>
-                                  <a:lumOff val="40000"/>
-                                </a:schemeClr>
-                              </a:solidFill>
-                              <a:latin typeface="Cambria Math" panose="02040503050406030204" pitchFamily="18" charset="0"/>
-                            </a:rPr>
-                          </m:ctrlPr>
-                        </m:sSubPr>
-                        <m:e>
-                          <m:r>
-                            <a:rPr lang="ar-AE" sz="2400" i="1">
-                              <a:solidFill>
-                                <a:schemeClr val="accent6">
-                                  <a:lumMod val="60000"/>
-                                  <a:lumOff val="40000"/>
-                                </a:schemeClr>
-                              </a:solidFill>
-                              <a:latin typeface="Cambria Math" panose="02040503050406030204" pitchFamily="18" charset="0"/>
-                            </a:rPr>
-                            <m:t>𝑖</m:t>
-                          </m:r>
-                        </m:e>
-                        <m:sub>
-                          <m:r>
-                            <a:rPr lang="ar-AE" sz="2400" i="1">
-                              <a:solidFill>
-                                <a:schemeClr val="accent6">
-                                  <a:lumMod val="60000"/>
-                                  <a:lumOff val="40000"/>
-                                </a:schemeClr>
-                              </a:solidFill>
-                              <a:latin typeface="Cambria Math" panose="02040503050406030204" pitchFamily="18" charset="0"/>
-                            </a:rPr>
-                            <m:t>𝑡</m:t>
-                          </m:r>
-                        </m:sub>
-                      </m:sSub>
-                      <m:r>
-                        <a:rPr lang="ar-AE" sz="2400" i="0">
-                          <a:solidFill>
-                            <a:schemeClr val="accent6">
-                              <a:lumMod val="60000"/>
-                              <a:lumOff val="40000"/>
-                            </a:schemeClr>
-                          </a:solidFill>
-                          <a:latin typeface="Cambria Math" panose="02040503050406030204" pitchFamily="18" charset="0"/>
-                        </a:rPr>
-                        <m:t>=</m:t>
-                      </m:r>
-                      <m:r>
-                        <a:rPr lang="ar-AE" sz="2400" i="1">
-                          <a:solidFill>
-                            <a:schemeClr val="accent6">
-                              <a:lumMod val="60000"/>
-                              <a:lumOff val="40000"/>
-                            </a:schemeClr>
-                          </a:solidFill>
-                          <a:latin typeface="Cambria Math" panose="02040503050406030204" pitchFamily="18" charset="0"/>
-                        </a:rPr>
-                        <m:t>𝜎</m:t>
-                      </m:r>
-                      <m:d>
-                        <m:dPr>
-                          <m:ctrlPr>
-                            <a:rPr lang="ar-AE" sz="2400" i="1">
-                              <a:solidFill>
-                                <a:schemeClr val="accent6">
-                                  <a:lumMod val="60000"/>
-                                  <a:lumOff val="40000"/>
-                                </a:schemeClr>
-                              </a:solidFill>
-                              <a:latin typeface="Cambria Math" panose="02040503050406030204" pitchFamily="18" charset="0"/>
-                            </a:rPr>
-                          </m:ctrlPr>
-                        </m:dPr>
-                        <m:e>
-                          <m:sSub>
-                            <m:sSubPr>
-                              <m:ctrlPr>
-                                <a:rPr lang="ar-AE" sz="2400" i="1">
-                                  <a:solidFill>
-                                    <a:schemeClr val="accent6">
-                                      <a:lumMod val="60000"/>
-                                      <a:lumOff val="40000"/>
-                                    </a:schemeClr>
-                                  </a:solidFill>
-                                  <a:latin typeface="Cambria Math" panose="02040503050406030204" pitchFamily="18" charset="0"/>
-                                </a:rPr>
-                              </m:ctrlPr>
-                            </m:sSubPr>
-                            <m:e>
-                              <m:r>
-                                <a:rPr lang="ar-AE" sz="2400" i="1">
-                                  <a:solidFill>
-                                    <a:schemeClr val="accent6">
-                                      <a:lumMod val="60000"/>
-                                      <a:lumOff val="40000"/>
-                                    </a:schemeClr>
-                                  </a:solidFill>
-                                  <a:latin typeface="Cambria Math" panose="02040503050406030204" pitchFamily="18" charset="0"/>
-                                </a:rPr>
-                                <m:t>𝑊</m:t>
-                              </m:r>
-                            </m:e>
-                            <m:sub>
-                              <m:r>
-                                <a:rPr lang="ar-AE" sz="2400" i="1">
-                                  <a:solidFill>
-                                    <a:schemeClr val="accent6">
-                                      <a:lumMod val="60000"/>
-                                      <a:lumOff val="40000"/>
-                                    </a:schemeClr>
-                                  </a:solidFill>
-                                  <a:latin typeface="Cambria Math" panose="02040503050406030204" pitchFamily="18" charset="0"/>
-                                </a:rPr>
-                                <m:t>𝑖</m:t>
-                              </m:r>
-                            </m:sub>
-                          </m:sSub>
-                          <m:d>
-                            <m:dPr>
-                              <m:begChr m:val="["/>
-                              <m:endChr m:val="]"/>
-                              <m:sepChr m:val=","/>
-                              <m:ctrlPr>
-                                <a:rPr lang="ar-AE" sz="2400" i="1" smtClean="0">
-                                  <a:solidFill>
-                                    <a:schemeClr val="accent6">
-                                      <a:lumMod val="60000"/>
-                                      <a:lumOff val="40000"/>
-                                    </a:schemeClr>
-                                  </a:solidFill>
-                                  <a:latin typeface="Cambria Math" panose="02040503050406030204" pitchFamily="18" charset="0"/>
-                                </a:rPr>
-                              </m:ctrlPr>
-                            </m:dPr>
-                            <m:e>
-                              <m:sSub>
-                                <m:sSubPr>
-                                  <m:ctrlPr>
-                                    <a:rPr lang="ar-AE" sz="2400" i="1">
-                                      <a:solidFill>
-                                        <a:schemeClr val="accent6">
-                                          <a:lumMod val="60000"/>
-                                          <a:lumOff val="40000"/>
-                                        </a:schemeClr>
-                                      </a:solidFill>
-                                      <a:latin typeface="Cambria Math" panose="02040503050406030204" pitchFamily="18" charset="0"/>
-                                    </a:rPr>
-                                  </m:ctrlPr>
-                                </m:sSubPr>
-                                <m:e>
-                                  <m:r>
-                                    <a:rPr lang="ar-AE" sz="2400" i="1">
-                                      <a:solidFill>
-                                        <a:schemeClr val="accent6">
-                                          <a:lumMod val="60000"/>
-                                          <a:lumOff val="40000"/>
-                                        </a:schemeClr>
-                                      </a:solidFill>
-                                      <a:latin typeface="Cambria Math" panose="02040503050406030204" pitchFamily="18" charset="0"/>
-                                    </a:rPr>
-                                    <m:t>h</m:t>
-                                  </m:r>
-                                </m:e>
-                                <m:sub>
-                                  <m:r>
-                                    <a:rPr lang="ar-AE" sz="2400" i="1">
-                                      <a:solidFill>
-                                        <a:schemeClr val="accent6">
-                                          <a:lumMod val="60000"/>
-                                          <a:lumOff val="40000"/>
-                                        </a:schemeClr>
-                                      </a:solidFill>
-                                      <a:latin typeface="Cambria Math" panose="02040503050406030204" pitchFamily="18" charset="0"/>
-                                    </a:rPr>
-                                    <m:t>𝑡</m:t>
-                                  </m:r>
-                                  <m:r>
-                                    <a:rPr lang="ar-AE" sz="2400" i="0">
-                                      <a:solidFill>
-                                        <a:schemeClr val="accent6">
-                                          <a:lumMod val="60000"/>
-                                          <a:lumOff val="40000"/>
-                                        </a:schemeClr>
-                                      </a:solidFill>
-                                      <a:latin typeface="Cambria Math" panose="02040503050406030204" pitchFamily="18" charset="0"/>
-                                    </a:rPr>
-                                    <m:t>−</m:t>
-                                  </m:r>
-                                  <m:r>
-                                    <a:rPr lang="ar-AE" sz="2400" i="0">
-                                      <a:solidFill>
-                                        <a:schemeClr val="accent6">
-                                          <a:lumMod val="60000"/>
-                                          <a:lumOff val="40000"/>
-                                        </a:schemeClr>
-                                      </a:solidFill>
-                                      <a:latin typeface="Cambria Math" panose="02040503050406030204" pitchFamily="18" charset="0"/>
-                                    </a:rPr>
-                                    <m:t>1</m:t>
-                                  </m:r>
-                                </m:sub>
-                              </m:sSub>
-                              <m:r>
-                                <a:rPr lang="en-US" sz="2400" b="0" i="1" smtClean="0">
-                                  <a:solidFill>
-                                    <a:schemeClr val="accent6">
-                                      <a:lumMod val="60000"/>
-                                      <a:lumOff val="40000"/>
-                                    </a:schemeClr>
-                                  </a:solidFill>
-                                  <a:latin typeface="Cambria Math" panose="02040503050406030204" pitchFamily="18" charset="0"/>
-                                </a:rPr>
-                                <m:t> </m:t>
-                              </m:r>
-                            </m:e>
-                            <m:e>
-                              <m:sSub>
-                                <m:sSubPr>
-                                  <m:ctrlPr>
-                                    <a:rPr lang="ar-AE" sz="2400" i="1">
-                                      <a:solidFill>
-                                        <a:schemeClr val="accent6">
-                                          <a:lumMod val="60000"/>
-                                          <a:lumOff val="40000"/>
-                                        </a:schemeClr>
-                                      </a:solidFill>
-                                      <a:latin typeface="Cambria Math" panose="02040503050406030204" pitchFamily="18" charset="0"/>
-                                    </a:rPr>
-                                  </m:ctrlPr>
-                                </m:sSubPr>
-                                <m:e>
-                                  <m:r>
-                                    <a:rPr lang="en-US" sz="2400" b="0" i="1" smtClean="0">
-                                      <a:solidFill>
-                                        <a:schemeClr val="accent6">
-                                          <a:lumMod val="60000"/>
-                                          <a:lumOff val="40000"/>
-                                        </a:schemeClr>
-                                      </a:solidFill>
-                                      <a:latin typeface="Cambria Math" panose="02040503050406030204" pitchFamily="18" charset="0"/>
-                                    </a:rPr>
-                                    <m:t> </m:t>
-                                  </m:r>
-                                  <m:r>
-                                    <a:rPr lang="ar-AE" sz="2400" i="1">
-                                      <a:solidFill>
-                                        <a:schemeClr val="accent6">
-                                          <a:lumMod val="60000"/>
-                                          <a:lumOff val="40000"/>
-                                        </a:schemeClr>
-                                      </a:solidFill>
-                                      <a:latin typeface="Cambria Math" panose="02040503050406030204" pitchFamily="18" charset="0"/>
-                                    </a:rPr>
-                                    <m:t>𝑥</m:t>
-                                  </m:r>
-                                </m:e>
-                                <m:sub>
-                                  <m:r>
-                                    <a:rPr lang="ar-AE" sz="2400" i="1">
-                                      <a:solidFill>
-                                        <a:schemeClr val="accent6">
-                                          <a:lumMod val="60000"/>
-                                          <a:lumOff val="40000"/>
-                                        </a:schemeClr>
-                                      </a:solidFill>
-                                      <a:latin typeface="Cambria Math" panose="02040503050406030204" pitchFamily="18" charset="0"/>
-                                    </a:rPr>
-                                    <m:t>𝑡</m:t>
-                                  </m:r>
-                                </m:sub>
-                              </m:sSub>
-                            </m:e>
-                          </m:d>
-                          <m:r>
-                            <a:rPr lang="ar-AE" sz="2400" i="0">
-                              <a:solidFill>
-                                <a:schemeClr val="accent6">
-                                  <a:lumMod val="60000"/>
-                                  <a:lumOff val="40000"/>
-                                </a:schemeClr>
-                              </a:solidFill>
-                              <a:latin typeface="Cambria Math" panose="02040503050406030204" pitchFamily="18" charset="0"/>
-                            </a:rPr>
-                            <m:t>+</m:t>
-                          </m:r>
-                          <m:sSub>
-                            <m:sSubPr>
-                              <m:ctrlPr>
-                                <a:rPr lang="ar-AE" sz="2400" i="1">
-                                  <a:solidFill>
-                                    <a:schemeClr val="accent6">
-                                      <a:lumMod val="60000"/>
-                                      <a:lumOff val="40000"/>
-                                    </a:schemeClr>
-                                  </a:solidFill>
-                                  <a:latin typeface="Cambria Math" panose="02040503050406030204" pitchFamily="18" charset="0"/>
-                                </a:rPr>
-                              </m:ctrlPr>
-                            </m:sSubPr>
-                            <m:e>
-                              <m:r>
-                                <a:rPr lang="ar-AE" sz="2400" i="1">
-                                  <a:solidFill>
-                                    <a:schemeClr val="accent6">
-                                      <a:lumMod val="60000"/>
-                                      <a:lumOff val="40000"/>
-                                    </a:schemeClr>
-                                  </a:solidFill>
-                                  <a:latin typeface="Cambria Math" panose="02040503050406030204" pitchFamily="18" charset="0"/>
-                                </a:rPr>
-                                <m:t>𝑏</m:t>
-                              </m:r>
-                            </m:e>
-                            <m:sub>
-                              <m:r>
-                                <a:rPr lang="ar-AE" sz="2400" i="1">
-                                  <a:solidFill>
-                                    <a:schemeClr val="accent6">
-                                      <a:lumMod val="60000"/>
-                                      <a:lumOff val="40000"/>
-                                    </a:schemeClr>
-                                  </a:solidFill>
-                                  <a:latin typeface="Cambria Math" panose="02040503050406030204" pitchFamily="18" charset="0"/>
-                                </a:rPr>
-                                <m:t>𝑖</m:t>
-                              </m:r>
-                            </m:sub>
-                          </m:sSub>
-                        </m:e>
-                      </m:d>
-                    </m:oMath>
-                  </m:oMathPara>
+                  <m:oMath xmlns:m="http://schemas.openxmlformats.org/officeDocument/2006/math">
+                    <m:sSub>
+                      <m:sSubPr>
+                        <m:ctrlPr>
+                          <a:rPr lang="ar-AE" sz="2400" b="1" i="1">
+                            <a:solidFill>
+                              <a:schemeClr val="accent6">
+                                <a:lumMod val="60000"/>
+                                <a:lumOff val="40000"/>
+                              </a:schemeClr>
+                            </a:solidFill>
+                            <a:latin typeface="Cambria Math" panose="02040503050406030204" pitchFamily="18" charset="0"/>
+                          </a:rPr>
+                        </m:ctrlPr>
+                      </m:sSubPr>
+                      <m:e>
+                        <m:r>
+                          <a:rPr lang="ar-AE" sz="2400" b="1" i="1">
+                            <a:solidFill>
+                              <a:schemeClr val="accent6">
+                                <a:lumMod val="60000"/>
+                                <a:lumOff val="40000"/>
+                              </a:schemeClr>
+                            </a:solidFill>
+                            <a:latin typeface="Cambria Math" panose="02040503050406030204" pitchFamily="18" charset="0"/>
+                          </a:rPr>
+                          <m:t>𝒄</m:t>
+                        </m:r>
+                      </m:e>
+                      <m:sub>
+                        <m:r>
+                          <a:rPr lang="ar-AE" sz="2400" b="1" i="1">
+                            <a:solidFill>
+                              <a:schemeClr val="accent6">
+                                <a:lumMod val="60000"/>
+                                <a:lumOff val="40000"/>
+                              </a:schemeClr>
+                            </a:solidFill>
+                            <a:latin typeface="Cambria Math" panose="02040503050406030204" pitchFamily="18" charset="0"/>
+                          </a:rPr>
+                          <m:t>𝒕</m:t>
+                        </m:r>
+                      </m:sub>
+                    </m:sSub>
+                    <m:r>
+                      <a:rPr lang="ar-AE" sz="2400" b="1" i="0">
+                        <a:solidFill>
+                          <a:schemeClr val="accent6">
+                            <a:lumMod val="60000"/>
+                            <a:lumOff val="40000"/>
+                          </a:schemeClr>
+                        </a:solidFill>
+                        <a:latin typeface="Cambria Math" panose="02040503050406030204" pitchFamily="18" charset="0"/>
+                      </a:rPr>
+                      <m:t>=</m:t>
+                    </m:r>
+                    <m:sSub>
+                      <m:sSubPr>
+                        <m:ctrlPr>
+                          <a:rPr lang="ar-AE" sz="2400" b="1" i="1">
+                            <a:solidFill>
+                              <a:schemeClr val="accent6">
+                                <a:lumMod val="60000"/>
+                                <a:lumOff val="40000"/>
+                              </a:schemeClr>
+                            </a:solidFill>
+                            <a:latin typeface="Cambria Math" panose="02040503050406030204" pitchFamily="18" charset="0"/>
+                          </a:rPr>
+                        </m:ctrlPr>
+                      </m:sSubPr>
+                      <m:e>
+                        <m:r>
+                          <a:rPr lang="ar-AE" sz="2400" b="1" i="1">
+                            <a:solidFill>
+                              <a:schemeClr val="accent6">
+                                <a:lumMod val="60000"/>
+                                <a:lumOff val="40000"/>
+                              </a:schemeClr>
+                            </a:solidFill>
+                            <a:latin typeface="Cambria Math" panose="02040503050406030204" pitchFamily="18" charset="0"/>
+                          </a:rPr>
+                          <m:t>𝒇</m:t>
+                        </m:r>
+                      </m:e>
+                      <m:sub>
+                        <m:r>
+                          <a:rPr lang="ar-AE" sz="2400" b="1" i="1">
+                            <a:solidFill>
+                              <a:schemeClr val="accent6">
+                                <a:lumMod val="60000"/>
+                                <a:lumOff val="40000"/>
+                              </a:schemeClr>
+                            </a:solidFill>
+                            <a:latin typeface="Cambria Math" panose="02040503050406030204" pitchFamily="18" charset="0"/>
+                          </a:rPr>
+                          <m:t>𝒕</m:t>
+                        </m:r>
+                      </m:sub>
+                    </m:sSub>
+                    <m:r>
+                      <a:rPr lang="ar-AE" sz="2400" b="1" i="0">
+                        <a:solidFill>
+                          <a:schemeClr val="accent6">
+                            <a:lumMod val="60000"/>
+                            <a:lumOff val="40000"/>
+                          </a:schemeClr>
+                        </a:solidFill>
+                        <a:latin typeface="Cambria Math" panose="02040503050406030204" pitchFamily="18" charset="0"/>
+                      </a:rPr>
+                      <m:t>⋅</m:t>
+                    </m:r>
+                    <m:sSub>
+                      <m:sSubPr>
+                        <m:ctrlPr>
+                          <a:rPr lang="ar-AE" sz="2400" b="1" i="1" smtClean="0">
+                            <a:solidFill>
+                              <a:schemeClr val="accent6">
+                                <a:lumMod val="60000"/>
+                                <a:lumOff val="40000"/>
+                              </a:schemeClr>
+                            </a:solidFill>
+                            <a:latin typeface="Cambria Math" panose="02040503050406030204" pitchFamily="18" charset="0"/>
+                          </a:rPr>
+                        </m:ctrlPr>
+                      </m:sSubPr>
+                      <m:e>
+                        <m:r>
+                          <a:rPr lang="ar-AE" sz="2400" b="1" i="1">
+                            <a:solidFill>
+                              <a:schemeClr val="accent6">
+                                <a:lumMod val="60000"/>
+                                <a:lumOff val="40000"/>
+                              </a:schemeClr>
+                            </a:solidFill>
+                            <a:latin typeface="Cambria Math" panose="02040503050406030204" pitchFamily="18" charset="0"/>
+                          </a:rPr>
+                          <m:t>𝒄</m:t>
+                        </m:r>
+                      </m:e>
+                      <m:sub>
+                        <m:r>
+                          <a:rPr lang="ar-AE" sz="2400" b="1" i="1">
+                            <a:solidFill>
+                              <a:schemeClr val="accent6">
+                                <a:lumMod val="60000"/>
+                                <a:lumOff val="40000"/>
+                              </a:schemeClr>
+                            </a:solidFill>
+                            <a:latin typeface="Cambria Math" panose="02040503050406030204" pitchFamily="18" charset="0"/>
+                          </a:rPr>
+                          <m:t>𝒕</m:t>
+                        </m:r>
+                        <m:r>
+                          <a:rPr lang="ar-AE" sz="2400" b="1" i="1">
+                            <a:solidFill>
+                              <a:schemeClr val="accent6">
+                                <a:lumMod val="60000"/>
+                                <a:lumOff val="40000"/>
+                              </a:schemeClr>
+                            </a:solidFill>
+                            <a:latin typeface="Cambria Math" panose="02040503050406030204" pitchFamily="18" charset="0"/>
+                          </a:rPr>
+                          <m:t>−</m:t>
+                        </m:r>
+                        <m:r>
+                          <a:rPr lang="ar-AE" sz="2400" b="1" i="1">
+                            <a:solidFill>
+                              <a:schemeClr val="accent6">
+                                <a:lumMod val="60000"/>
+                                <a:lumOff val="40000"/>
+                              </a:schemeClr>
+                            </a:solidFill>
+                            <a:latin typeface="Cambria Math" panose="02040503050406030204" pitchFamily="18" charset="0"/>
+                          </a:rPr>
+                          <m:t>𝟏</m:t>
+                        </m:r>
+                      </m:sub>
+                    </m:sSub>
+                    <m:r>
+                      <a:rPr lang="ar-AE" sz="2400" b="1" i="0">
+                        <a:solidFill>
+                          <a:schemeClr val="accent6">
+                            <a:lumMod val="60000"/>
+                            <a:lumOff val="40000"/>
+                          </a:schemeClr>
+                        </a:solidFill>
+                        <a:latin typeface="Cambria Math" panose="02040503050406030204" pitchFamily="18" charset="0"/>
+                      </a:rPr>
+                      <m:t>+</m:t>
+                    </m:r>
+                    <m:sSub>
+                      <m:sSubPr>
+                        <m:ctrlPr>
+                          <a:rPr lang="ar-AE" sz="2400" b="1" i="1">
+                            <a:solidFill>
+                              <a:schemeClr val="accent6">
+                                <a:lumMod val="60000"/>
+                                <a:lumOff val="40000"/>
+                              </a:schemeClr>
+                            </a:solidFill>
+                            <a:latin typeface="Cambria Math" panose="02040503050406030204" pitchFamily="18" charset="0"/>
+                          </a:rPr>
+                        </m:ctrlPr>
+                      </m:sSubPr>
+                      <m:e>
+                        <m:r>
+                          <a:rPr lang="ar-AE" sz="2400" b="1" i="1">
+                            <a:solidFill>
+                              <a:schemeClr val="accent6">
+                                <a:lumMod val="60000"/>
+                                <a:lumOff val="40000"/>
+                              </a:schemeClr>
+                            </a:solidFill>
+                            <a:latin typeface="Cambria Math" panose="02040503050406030204" pitchFamily="18" charset="0"/>
+                          </a:rPr>
+                          <m:t>𝒊</m:t>
+                        </m:r>
+                      </m:e>
+                      <m:sub>
+                        <m:r>
+                          <a:rPr lang="ar-AE" sz="2400" b="1" i="1">
+                            <a:solidFill>
+                              <a:schemeClr val="accent6">
+                                <a:lumMod val="60000"/>
+                                <a:lumOff val="40000"/>
+                              </a:schemeClr>
+                            </a:solidFill>
+                            <a:latin typeface="Cambria Math" panose="02040503050406030204" pitchFamily="18" charset="0"/>
+                          </a:rPr>
+                          <m:t>𝒕</m:t>
+                        </m:r>
+                      </m:sub>
+                    </m:sSub>
+                    <m:r>
+                      <a:rPr lang="ar-AE" sz="2400" b="1" i="0">
+                        <a:solidFill>
+                          <a:schemeClr val="accent6">
+                            <a:lumMod val="60000"/>
+                            <a:lumOff val="40000"/>
+                          </a:schemeClr>
+                        </a:solidFill>
+                        <a:latin typeface="Cambria Math" panose="02040503050406030204" pitchFamily="18" charset="0"/>
+                      </a:rPr>
+                      <m:t>⋅</m:t>
+                    </m:r>
+                    <m:sSub>
+                      <m:sSubPr>
+                        <m:ctrlPr>
+                          <a:rPr lang="ar-AE" sz="2400" b="1" i="1" smtClean="0">
+                            <a:solidFill>
+                              <a:schemeClr val="accent6">
+                                <a:lumMod val="60000"/>
+                                <a:lumOff val="40000"/>
+                              </a:schemeClr>
+                            </a:solidFill>
+                            <a:latin typeface="Cambria Math" panose="02040503050406030204" pitchFamily="18" charset="0"/>
+                          </a:rPr>
+                        </m:ctrlPr>
+                      </m:sSubPr>
+                      <m:e>
+                        <m:acc>
+                          <m:accPr>
+                            <m:chr m:val="̃"/>
+                            <m:ctrlPr>
+                              <a:rPr lang="ar-AE" sz="2400" b="1" i="1">
+                                <a:solidFill>
+                                  <a:schemeClr val="accent6">
+                                    <a:lumMod val="60000"/>
+                                    <a:lumOff val="40000"/>
+                                  </a:schemeClr>
+                                </a:solidFill>
+                                <a:latin typeface="Cambria Math" panose="02040503050406030204" pitchFamily="18" charset="0"/>
+                              </a:rPr>
+                            </m:ctrlPr>
+                          </m:accPr>
+                          <m:e>
+                            <m:r>
+                              <a:rPr lang="ar-AE" sz="2400" b="1" i="1">
+                                <a:solidFill>
+                                  <a:schemeClr val="accent6">
+                                    <a:lumMod val="60000"/>
+                                    <a:lumOff val="40000"/>
+                                  </a:schemeClr>
+                                </a:solidFill>
+                                <a:latin typeface="Cambria Math" panose="02040503050406030204" pitchFamily="18" charset="0"/>
+                              </a:rPr>
+                              <m:t>𝒄</m:t>
+                            </m:r>
+                          </m:e>
+                        </m:acc>
+                      </m:e>
+                      <m:sub>
+                        <m:r>
+                          <a:rPr lang="ar-AE" sz="2400" b="1" i="1">
+                            <a:solidFill>
+                              <a:schemeClr val="accent6">
+                                <a:lumMod val="60000"/>
+                                <a:lumOff val="40000"/>
+                              </a:schemeClr>
+                            </a:solidFill>
+                            <a:latin typeface="Cambria Math" panose="02040503050406030204" pitchFamily="18" charset="0"/>
+                          </a:rPr>
+                          <m:t>𝒕</m:t>
+                        </m:r>
+                      </m:sub>
+                    </m:sSub>
+                  </m:oMath>
                 </a14:m>
-                <a:endParaRPr lang="ar-AE" sz="2400" dirty="0">
+                <a:r>
+                  <a:rPr lang="en-US" sz="2400" b="1" dirty="0">
+                    <a:solidFill>
+                      <a:schemeClr val="accent6">
+                        <a:lumMod val="60000"/>
+                        <a:lumOff val="40000"/>
+                      </a:schemeClr>
+                    </a:solidFill>
+                  </a:rPr>
+                  <a:t>                   </a:t>
+                </a:r>
+                <a:r>
+                  <a:rPr lang="en-US" sz="2400" dirty="0">
+                    <a:solidFill>
+                      <a:schemeClr val="accent6">
+                        <a:lumMod val="60000"/>
+                        <a:lumOff val="40000"/>
+                      </a:schemeClr>
+                    </a:solidFill>
+                  </a:rPr>
+                  <a:t>-&gt; input gate equation</a:t>
+                </a:r>
+              </a:p>
+              <a:p>
+                <a:pPr>
+                  <a:buNone/>
+                </a:pPr>
+                <a:endParaRPr lang="ar-AE" sz="2400" b="1" dirty="0">
                   <a:solidFill>
                     <a:schemeClr val="accent6">
                       <a:lumMod val="60000"/>
@@ -7192,532 +7868,225 @@
                   <a:buNone/>
                 </a:pPr>
                 <a14:m>
-                  <m:oMathPara xmlns:m="http://schemas.openxmlformats.org/officeDocument/2006/math">
-                    <m:oMathParaPr>
-                      <m:jc m:val="centerGroup"/>
-                    </m:oMathParaPr>
-                    <m:oMath xmlns:m="http://schemas.openxmlformats.org/officeDocument/2006/math">
-                      <m:sSub>
-                        <m:sSubPr>
-                          <m:ctrlPr>
-                            <a:rPr lang="ar-AE" sz="2400" i="1">
-                              <a:solidFill>
-                                <a:schemeClr val="accent6">
-                                  <a:lumMod val="60000"/>
-                                  <a:lumOff val="40000"/>
-                                </a:schemeClr>
-                              </a:solidFill>
-                              <a:latin typeface="Cambria Math" panose="02040503050406030204" pitchFamily="18" charset="0"/>
-                            </a:rPr>
-                          </m:ctrlPr>
-                        </m:sSubPr>
-                        <m:e>
-                          <m:r>
-                            <a:rPr lang="ar-AE" sz="2400" i="1">
-                              <a:solidFill>
-                                <a:schemeClr val="accent6">
-                                  <a:lumMod val="60000"/>
-                                  <a:lumOff val="40000"/>
-                                </a:schemeClr>
-                              </a:solidFill>
-                              <a:latin typeface="Cambria Math" panose="02040503050406030204" pitchFamily="18" charset="0"/>
-                            </a:rPr>
-                            <m:t>𝐶</m:t>
-                          </m:r>
-                        </m:e>
-                        <m:sub>
-                          <m:r>
-                            <a:rPr lang="ar-AE" sz="2400" i="1">
-                              <a:solidFill>
-                                <a:schemeClr val="accent6">
-                                  <a:lumMod val="60000"/>
-                                  <a:lumOff val="40000"/>
-                                </a:schemeClr>
-                              </a:solidFill>
-                              <a:latin typeface="Cambria Math" panose="02040503050406030204" pitchFamily="18" charset="0"/>
-                            </a:rPr>
-                            <m:t>𝑡</m:t>
-                          </m:r>
-                        </m:sub>
-                      </m:sSub>
-                      <m:r>
-                        <a:rPr lang="ar-AE" sz="2400" i="0">
-                          <a:solidFill>
-                            <a:schemeClr val="accent6">
-                              <a:lumMod val="60000"/>
-                              <a:lumOff val="40000"/>
-                            </a:schemeClr>
-                          </a:solidFill>
-                          <a:latin typeface="Cambria Math" panose="02040503050406030204" pitchFamily="18" charset="0"/>
-                        </a:rPr>
-                        <m:t>=</m:t>
-                      </m:r>
-                      <m:sSub>
-                        <m:sSubPr>
-                          <m:ctrlPr>
-                            <a:rPr lang="ar-AE" sz="2400" i="1">
-                              <a:solidFill>
-                                <a:schemeClr val="accent6">
-                                  <a:lumMod val="60000"/>
-                                  <a:lumOff val="40000"/>
-                                </a:schemeClr>
-                              </a:solidFill>
-                              <a:latin typeface="Cambria Math" panose="02040503050406030204" pitchFamily="18" charset="0"/>
-                            </a:rPr>
-                          </m:ctrlPr>
-                        </m:sSubPr>
-                        <m:e>
-                          <m:r>
-                            <a:rPr lang="ar-AE" sz="2400" i="1">
-                              <a:solidFill>
-                                <a:schemeClr val="accent6">
-                                  <a:lumMod val="60000"/>
-                                  <a:lumOff val="40000"/>
-                                </a:schemeClr>
-                              </a:solidFill>
-                              <a:latin typeface="Cambria Math" panose="02040503050406030204" pitchFamily="18" charset="0"/>
-                            </a:rPr>
-                            <m:t>𝑓</m:t>
-                          </m:r>
-                        </m:e>
-                        <m:sub>
-                          <m:r>
-                            <a:rPr lang="ar-AE" sz="2400" i="1">
-                              <a:solidFill>
-                                <a:schemeClr val="accent6">
-                                  <a:lumMod val="60000"/>
-                                  <a:lumOff val="40000"/>
-                                </a:schemeClr>
-                              </a:solidFill>
-                              <a:latin typeface="Cambria Math" panose="02040503050406030204" pitchFamily="18" charset="0"/>
-                            </a:rPr>
-                            <m:t>𝑡</m:t>
-                          </m:r>
-                        </m:sub>
-                      </m:sSub>
-                      <m:r>
-                        <a:rPr lang="ar-AE" sz="2400" i="0">
-                          <a:solidFill>
-                            <a:schemeClr val="accent6">
-                              <a:lumMod val="60000"/>
-                              <a:lumOff val="40000"/>
-                            </a:schemeClr>
-                          </a:solidFill>
-                          <a:latin typeface="Cambria Math" panose="02040503050406030204" pitchFamily="18" charset="0"/>
-                        </a:rPr>
-                        <m:t>⋅</m:t>
-                      </m:r>
-                      <m:sSub>
-                        <m:sSubPr>
-                          <m:ctrlPr>
-                            <a:rPr lang="ar-AE" sz="2400" i="1">
-                              <a:solidFill>
-                                <a:schemeClr val="accent6">
-                                  <a:lumMod val="60000"/>
-                                  <a:lumOff val="40000"/>
-                                </a:schemeClr>
-                              </a:solidFill>
-                              <a:latin typeface="Cambria Math" panose="02040503050406030204" pitchFamily="18" charset="0"/>
-                            </a:rPr>
-                          </m:ctrlPr>
-                        </m:sSubPr>
-                        <m:e>
-                          <m:r>
-                            <a:rPr lang="ar-AE" sz="2400" i="1">
-                              <a:solidFill>
-                                <a:schemeClr val="accent6">
-                                  <a:lumMod val="60000"/>
-                                  <a:lumOff val="40000"/>
-                                </a:schemeClr>
-                              </a:solidFill>
-                              <a:latin typeface="Cambria Math" panose="02040503050406030204" pitchFamily="18" charset="0"/>
-                            </a:rPr>
-                            <m:t>𝐶</m:t>
-                          </m:r>
-                        </m:e>
-                        <m:sub>
-                          <m:r>
-                            <a:rPr lang="ar-AE" sz="2400" i="1">
-                              <a:solidFill>
-                                <a:schemeClr val="accent6">
-                                  <a:lumMod val="60000"/>
-                                  <a:lumOff val="40000"/>
-                                </a:schemeClr>
-                              </a:solidFill>
-                              <a:latin typeface="Cambria Math" panose="02040503050406030204" pitchFamily="18" charset="0"/>
-                            </a:rPr>
-                            <m:t>𝑡</m:t>
-                          </m:r>
-                          <m:r>
-                            <a:rPr lang="ar-AE" sz="2400" i="0">
-                              <a:solidFill>
-                                <a:schemeClr val="accent6">
-                                  <a:lumMod val="60000"/>
-                                  <a:lumOff val="40000"/>
-                                </a:schemeClr>
-                              </a:solidFill>
-                              <a:latin typeface="Cambria Math" panose="02040503050406030204" pitchFamily="18" charset="0"/>
-                            </a:rPr>
-                            <m:t>−</m:t>
-                          </m:r>
-                          <m:r>
-                            <a:rPr lang="ar-AE" sz="2400" i="0">
-                              <a:solidFill>
-                                <a:schemeClr val="accent6">
-                                  <a:lumMod val="60000"/>
-                                  <a:lumOff val="40000"/>
-                                </a:schemeClr>
-                              </a:solidFill>
-                              <a:latin typeface="Cambria Math" panose="02040503050406030204" pitchFamily="18" charset="0"/>
-                            </a:rPr>
-                            <m:t>1</m:t>
-                          </m:r>
-                        </m:sub>
-                      </m:sSub>
-                      <m:r>
-                        <a:rPr lang="ar-AE" sz="2400" i="0">
-                          <a:solidFill>
-                            <a:schemeClr val="accent6">
-                              <a:lumMod val="60000"/>
-                              <a:lumOff val="40000"/>
-                            </a:schemeClr>
-                          </a:solidFill>
-                          <a:latin typeface="Cambria Math" panose="02040503050406030204" pitchFamily="18" charset="0"/>
-                        </a:rPr>
-                        <m:t>+</m:t>
-                      </m:r>
-                      <m:sSub>
-                        <m:sSubPr>
-                          <m:ctrlPr>
-                            <a:rPr lang="ar-AE" sz="2400" i="1">
-                              <a:solidFill>
-                                <a:schemeClr val="accent6">
-                                  <a:lumMod val="60000"/>
-                                  <a:lumOff val="40000"/>
-                                </a:schemeClr>
-                              </a:solidFill>
-                              <a:latin typeface="Cambria Math" panose="02040503050406030204" pitchFamily="18" charset="0"/>
-                            </a:rPr>
-                          </m:ctrlPr>
-                        </m:sSubPr>
-                        <m:e>
-                          <m:r>
-                            <a:rPr lang="ar-AE" sz="2400" i="1">
-                              <a:solidFill>
-                                <a:schemeClr val="accent6">
-                                  <a:lumMod val="60000"/>
-                                  <a:lumOff val="40000"/>
-                                </a:schemeClr>
-                              </a:solidFill>
-                              <a:latin typeface="Cambria Math" panose="02040503050406030204" pitchFamily="18" charset="0"/>
-                            </a:rPr>
-                            <m:t>𝑖</m:t>
-                          </m:r>
-                        </m:e>
-                        <m:sub>
-                          <m:r>
-                            <a:rPr lang="ar-AE" sz="2400" i="1">
-                              <a:solidFill>
-                                <a:schemeClr val="accent6">
-                                  <a:lumMod val="60000"/>
-                                  <a:lumOff val="40000"/>
-                                </a:schemeClr>
-                              </a:solidFill>
-                              <a:latin typeface="Cambria Math" panose="02040503050406030204" pitchFamily="18" charset="0"/>
-                            </a:rPr>
-                            <m:t>𝑡</m:t>
-                          </m:r>
-                        </m:sub>
-                      </m:sSub>
-                      <m:r>
-                        <a:rPr lang="ar-AE" sz="2400" i="0">
-                          <a:solidFill>
-                            <a:schemeClr val="accent6">
-                              <a:lumMod val="60000"/>
-                              <a:lumOff val="40000"/>
-                            </a:schemeClr>
-                          </a:solidFill>
-                          <a:latin typeface="Cambria Math" panose="02040503050406030204" pitchFamily="18" charset="0"/>
-                        </a:rPr>
-                        <m:t>⋅</m:t>
-                      </m:r>
-                      <m:r>
-                        <a:rPr lang="ar-AE" sz="2400" i="1">
-                          <a:solidFill>
-                            <a:schemeClr val="accent6">
-                              <a:lumMod val="60000"/>
-                              <a:lumOff val="40000"/>
-                            </a:schemeClr>
-                          </a:solidFill>
-                          <a:latin typeface="Cambria Math" panose="02040503050406030204" pitchFamily="18" charset="0"/>
-                        </a:rPr>
-                        <m:t>𝑡𝑖𝑙𝑑𝑒</m:t>
-                      </m:r>
-                      <m:sSub>
-                        <m:sSubPr>
-                          <m:ctrlPr>
-                            <a:rPr lang="ar-AE" sz="2400" i="1">
-                              <a:solidFill>
-                                <a:schemeClr val="accent6">
-                                  <a:lumMod val="60000"/>
-                                  <a:lumOff val="40000"/>
-                                </a:schemeClr>
-                              </a:solidFill>
-                              <a:latin typeface="Cambria Math" panose="02040503050406030204" pitchFamily="18" charset="0"/>
-                            </a:rPr>
-                          </m:ctrlPr>
-                        </m:sSubPr>
-                        <m:e>
-                          <m:r>
-                            <a:rPr lang="ar-AE" sz="2400" i="1">
-                              <a:solidFill>
-                                <a:schemeClr val="accent6">
-                                  <a:lumMod val="60000"/>
-                                  <a:lumOff val="40000"/>
-                                </a:schemeClr>
-                              </a:solidFill>
-                              <a:latin typeface="Cambria Math" panose="02040503050406030204" pitchFamily="18" charset="0"/>
-                            </a:rPr>
-                            <m:t>𝐶</m:t>
-                          </m:r>
-                        </m:e>
-                        <m:sub>
-                          <m:r>
-                            <a:rPr lang="ar-AE" sz="2400" i="1">
-                              <a:solidFill>
-                                <a:schemeClr val="accent6">
-                                  <a:lumMod val="60000"/>
-                                  <a:lumOff val="40000"/>
-                                </a:schemeClr>
-                              </a:solidFill>
-                              <a:latin typeface="Cambria Math" panose="02040503050406030204" pitchFamily="18" charset="0"/>
-                            </a:rPr>
-                            <m:t>𝑡</m:t>
-                          </m:r>
-                        </m:sub>
-                      </m:sSub>
-                    </m:oMath>
-                  </m:oMathPara>
+                  <m:oMath xmlns:m="http://schemas.openxmlformats.org/officeDocument/2006/math">
+                    <m:sSub>
+                      <m:sSubPr>
+                        <m:ctrlPr>
+                          <a:rPr lang="ar-AE" sz="2400" b="1" i="1">
+                            <a:solidFill>
+                              <a:schemeClr val="accent6">
+                                <a:lumMod val="60000"/>
+                                <a:lumOff val="40000"/>
+                              </a:schemeClr>
+                            </a:solidFill>
+                            <a:latin typeface="Cambria Math" panose="02040503050406030204" pitchFamily="18" charset="0"/>
+                          </a:rPr>
+                        </m:ctrlPr>
+                      </m:sSubPr>
+                      <m:e>
+                        <m:r>
+                          <a:rPr lang="ar-AE" sz="2400" b="1" i="1">
+                            <a:solidFill>
+                              <a:schemeClr val="accent6">
+                                <a:lumMod val="60000"/>
+                                <a:lumOff val="40000"/>
+                              </a:schemeClr>
+                            </a:solidFill>
+                            <a:latin typeface="Cambria Math" panose="02040503050406030204" pitchFamily="18" charset="0"/>
+                          </a:rPr>
+                          <m:t>𝒉</m:t>
+                        </m:r>
+                      </m:e>
+                      <m:sub>
+                        <m:r>
+                          <a:rPr lang="ar-AE" sz="2400" b="1" i="1">
+                            <a:solidFill>
+                              <a:schemeClr val="accent6">
+                                <a:lumMod val="60000"/>
+                                <a:lumOff val="40000"/>
+                              </a:schemeClr>
+                            </a:solidFill>
+                            <a:latin typeface="Cambria Math" panose="02040503050406030204" pitchFamily="18" charset="0"/>
+                          </a:rPr>
+                          <m:t>𝒕</m:t>
+                        </m:r>
+                      </m:sub>
+                    </m:sSub>
+                    <m:r>
+                      <a:rPr lang="ar-AE" sz="2400" b="1" i="0">
+                        <a:solidFill>
+                          <a:schemeClr val="accent6">
+                            <a:lumMod val="60000"/>
+                            <a:lumOff val="40000"/>
+                          </a:schemeClr>
+                        </a:solidFill>
+                        <a:latin typeface="Cambria Math" panose="02040503050406030204" pitchFamily="18" charset="0"/>
+                      </a:rPr>
+                      <m:t>=</m:t>
+                    </m:r>
+                    <m:sSub>
+                      <m:sSubPr>
+                        <m:ctrlPr>
+                          <a:rPr lang="ar-AE" sz="2400" b="1" i="1">
+                            <a:solidFill>
+                              <a:schemeClr val="accent6">
+                                <a:lumMod val="60000"/>
+                                <a:lumOff val="40000"/>
+                              </a:schemeClr>
+                            </a:solidFill>
+                            <a:latin typeface="Cambria Math" panose="02040503050406030204" pitchFamily="18" charset="0"/>
+                          </a:rPr>
+                        </m:ctrlPr>
+                      </m:sSubPr>
+                      <m:e>
+                        <m:r>
+                          <a:rPr lang="ar-AE" sz="2400" b="1" i="1">
+                            <a:solidFill>
+                              <a:schemeClr val="accent6">
+                                <a:lumMod val="60000"/>
+                                <a:lumOff val="40000"/>
+                              </a:schemeClr>
+                            </a:solidFill>
+                            <a:latin typeface="Cambria Math" panose="02040503050406030204" pitchFamily="18" charset="0"/>
+                          </a:rPr>
+                          <m:t>𝒐</m:t>
+                        </m:r>
+                      </m:e>
+                      <m:sub>
+                        <m:r>
+                          <a:rPr lang="ar-AE" sz="2400" b="1" i="1">
+                            <a:solidFill>
+                              <a:schemeClr val="accent6">
+                                <a:lumMod val="60000"/>
+                                <a:lumOff val="40000"/>
+                              </a:schemeClr>
+                            </a:solidFill>
+                            <a:latin typeface="Cambria Math" panose="02040503050406030204" pitchFamily="18" charset="0"/>
+                          </a:rPr>
+                          <m:t>𝒕</m:t>
+                        </m:r>
+                      </m:sub>
+                    </m:sSub>
+                    <m:r>
+                      <a:rPr lang="ar-AE" sz="2400" b="1" i="0">
+                        <a:solidFill>
+                          <a:schemeClr val="accent6">
+                            <a:lumMod val="60000"/>
+                            <a:lumOff val="40000"/>
+                          </a:schemeClr>
+                        </a:solidFill>
+                        <a:latin typeface="Cambria Math" panose="02040503050406030204" pitchFamily="18" charset="0"/>
+                      </a:rPr>
+                      <m:t>⋅</m:t>
+                    </m:r>
+                    <m:r>
+                      <a:rPr lang="en-US" sz="2400" b="1" i="0">
+                        <a:solidFill>
+                          <a:schemeClr val="accent6">
+                            <a:lumMod val="60000"/>
+                            <a:lumOff val="40000"/>
+                          </a:schemeClr>
+                        </a:solidFill>
+                        <a:latin typeface="Cambria Math" panose="02040503050406030204" pitchFamily="18" charset="0"/>
+                      </a:rPr>
+                      <m:t>𝐭𝐚𝐧𝐡</m:t>
+                    </m:r>
+                    <m:r>
+                      <a:rPr lang="en-US" sz="2400" b="1" i="0">
+                        <a:solidFill>
+                          <a:schemeClr val="accent6">
+                            <a:lumMod val="60000"/>
+                            <a:lumOff val="40000"/>
+                          </a:schemeClr>
+                        </a:solidFill>
+                        <a:latin typeface="Cambria Math" panose="02040503050406030204" pitchFamily="18" charset="0"/>
+                      </a:rPr>
+                      <m:t>⁡</m:t>
+                    </m:r>
+                    <m:d>
+                      <m:dPr>
+                        <m:ctrlPr>
+                          <a:rPr lang="ar-AE" sz="2400" b="1" i="1">
+                            <a:solidFill>
+                              <a:schemeClr val="accent6">
+                                <a:lumMod val="60000"/>
+                                <a:lumOff val="40000"/>
+                              </a:schemeClr>
+                            </a:solidFill>
+                            <a:latin typeface="Cambria Math" panose="02040503050406030204" pitchFamily="18" charset="0"/>
+                          </a:rPr>
+                        </m:ctrlPr>
+                      </m:dPr>
+                      <m:e>
+                        <m:sSub>
+                          <m:sSubPr>
+                            <m:ctrlPr>
+                              <a:rPr lang="ar-AE" sz="2400" b="1" i="1">
+                                <a:solidFill>
+                                  <a:schemeClr val="accent6">
+                                    <a:lumMod val="60000"/>
+                                    <a:lumOff val="40000"/>
+                                  </a:schemeClr>
+                                </a:solidFill>
+                                <a:latin typeface="Cambria Math" panose="02040503050406030204" pitchFamily="18" charset="0"/>
+                              </a:rPr>
+                            </m:ctrlPr>
+                          </m:sSubPr>
+                          <m:e>
+                            <m:r>
+                              <a:rPr lang="ar-AE" sz="2400" b="1" i="1">
+                                <a:solidFill>
+                                  <a:schemeClr val="accent6">
+                                    <a:lumMod val="60000"/>
+                                    <a:lumOff val="40000"/>
+                                  </a:schemeClr>
+                                </a:solidFill>
+                                <a:latin typeface="Cambria Math" panose="02040503050406030204" pitchFamily="18" charset="0"/>
+                              </a:rPr>
+                              <m:t>𝒄</m:t>
+                            </m:r>
+                          </m:e>
+                          <m:sub>
+                            <m:r>
+                              <a:rPr lang="ar-AE" sz="2400" b="1" i="1">
+                                <a:solidFill>
+                                  <a:schemeClr val="accent6">
+                                    <a:lumMod val="60000"/>
+                                    <a:lumOff val="40000"/>
+                                  </a:schemeClr>
+                                </a:solidFill>
+                                <a:latin typeface="Cambria Math" panose="02040503050406030204" pitchFamily="18" charset="0"/>
+                              </a:rPr>
+                              <m:t>𝒕</m:t>
+                            </m:r>
+                          </m:sub>
+                        </m:sSub>
+                      </m:e>
+                    </m:d>
+                  </m:oMath>
                 </a14:m>
-                <a:endParaRPr lang="ar-AE" sz="2400" dirty="0">
-                  <a:solidFill>
-                    <a:schemeClr val="accent6">
-                      <a:lumMod val="60000"/>
-                      <a:lumOff val="40000"/>
-                    </a:schemeClr>
-                  </a:solidFill>
-                </a:endParaRPr>
-              </a:p>
-              <a:p>
-                <a:pPr>
-                  <a:buNone/>
-                </a:pPr>
-                <a14:m>
-                  <m:oMathPara xmlns:m="http://schemas.openxmlformats.org/officeDocument/2006/math">
-                    <m:oMathParaPr>
-                      <m:jc m:val="centerGroup"/>
-                    </m:oMathParaPr>
-                    <m:oMath xmlns:m="http://schemas.openxmlformats.org/officeDocument/2006/math">
-                      <m:sSub>
-                        <m:sSubPr>
-                          <m:ctrlPr>
-                            <a:rPr lang="ar-AE" sz="2400" i="1">
-                              <a:solidFill>
-                                <a:schemeClr val="accent6">
-                                  <a:lumMod val="60000"/>
-                                  <a:lumOff val="40000"/>
-                                </a:schemeClr>
-                              </a:solidFill>
-                              <a:latin typeface="Cambria Math" panose="02040503050406030204" pitchFamily="18" charset="0"/>
-                            </a:rPr>
-                          </m:ctrlPr>
-                        </m:sSubPr>
-                        <m:e>
-                          <m:r>
-                            <a:rPr lang="ar-AE" sz="2400" i="1">
-                              <a:solidFill>
-                                <a:schemeClr val="accent6">
-                                  <a:lumMod val="60000"/>
-                                  <a:lumOff val="40000"/>
-                                </a:schemeClr>
-                              </a:solidFill>
-                              <a:latin typeface="Cambria Math" panose="02040503050406030204" pitchFamily="18" charset="0"/>
-                            </a:rPr>
-                            <m:t>h</m:t>
-                          </m:r>
-                        </m:e>
-                        <m:sub>
-                          <m:r>
-                            <a:rPr lang="ar-AE" sz="2400" i="1">
-                              <a:solidFill>
-                                <a:schemeClr val="accent6">
-                                  <a:lumMod val="60000"/>
-                                  <a:lumOff val="40000"/>
-                                </a:schemeClr>
-                              </a:solidFill>
-                              <a:latin typeface="Cambria Math" panose="02040503050406030204" pitchFamily="18" charset="0"/>
-                            </a:rPr>
-                            <m:t>𝑡</m:t>
-                          </m:r>
-                        </m:sub>
-                      </m:sSub>
-                      <m:r>
-                        <a:rPr lang="ar-AE" sz="2400" i="0">
-                          <a:solidFill>
-                            <a:schemeClr val="accent6">
-                              <a:lumMod val="60000"/>
-                              <a:lumOff val="40000"/>
-                            </a:schemeClr>
-                          </a:solidFill>
-                          <a:latin typeface="Cambria Math" panose="02040503050406030204" pitchFamily="18" charset="0"/>
-                        </a:rPr>
-                        <m:t>=</m:t>
-                      </m:r>
-                      <m:sSub>
-                        <m:sSubPr>
-                          <m:ctrlPr>
-                            <a:rPr lang="ar-AE" sz="2400" i="1">
-                              <a:solidFill>
-                                <a:schemeClr val="accent6">
-                                  <a:lumMod val="60000"/>
-                                  <a:lumOff val="40000"/>
-                                </a:schemeClr>
-                              </a:solidFill>
-                              <a:latin typeface="Cambria Math" panose="02040503050406030204" pitchFamily="18" charset="0"/>
-                            </a:rPr>
-                          </m:ctrlPr>
-                        </m:sSubPr>
-                        <m:e>
-                          <m:r>
-                            <a:rPr lang="ar-AE" sz="2400" i="1">
-                              <a:solidFill>
-                                <a:schemeClr val="accent6">
-                                  <a:lumMod val="60000"/>
-                                  <a:lumOff val="40000"/>
-                                </a:schemeClr>
-                              </a:solidFill>
-                              <a:latin typeface="Cambria Math" panose="02040503050406030204" pitchFamily="18" charset="0"/>
-                            </a:rPr>
-                            <m:t>𝑜</m:t>
-                          </m:r>
-                        </m:e>
-                        <m:sub>
-                          <m:r>
-                            <a:rPr lang="ar-AE" sz="2400" i="1">
-                              <a:solidFill>
-                                <a:schemeClr val="accent6">
-                                  <a:lumMod val="60000"/>
-                                  <a:lumOff val="40000"/>
-                                </a:schemeClr>
-                              </a:solidFill>
-                              <a:latin typeface="Cambria Math" panose="02040503050406030204" pitchFamily="18" charset="0"/>
-                            </a:rPr>
-                            <m:t>𝑡</m:t>
-                          </m:r>
-                        </m:sub>
-                      </m:sSub>
-                      <m:r>
-                        <a:rPr lang="ar-AE" sz="2400" i="0">
-                          <a:solidFill>
-                            <a:schemeClr val="accent6">
-                              <a:lumMod val="60000"/>
-                              <a:lumOff val="40000"/>
-                            </a:schemeClr>
-                          </a:solidFill>
-                          <a:latin typeface="Cambria Math" panose="02040503050406030204" pitchFamily="18" charset="0"/>
-                        </a:rPr>
-                        <m:t>⋅</m:t>
-                      </m:r>
-                      <m:r>
-                        <m:rPr>
-                          <m:sty m:val="p"/>
-                        </m:rPr>
-                        <a:rPr lang="en-US" sz="2400" i="0">
-                          <a:solidFill>
-                            <a:schemeClr val="accent6">
-                              <a:lumMod val="60000"/>
-                              <a:lumOff val="40000"/>
-                            </a:schemeClr>
-                          </a:solidFill>
-                          <a:latin typeface="Cambria Math" panose="02040503050406030204" pitchFamily="18" charset="0"/>
-                        </a:rPr>
-                        <m:t>tanh</m:t>
-                      </m:r>
-                      <m:r>
-                        <a:rPr lang="en-US" sz="2400" i="0">
-                          <a:solidFill>
-                            <a:schemeClr val="accent6">
-                              <a:lumMod val="60000"/>
-                              <a:lumOff val="40000"/>
-                            </a:schemeClr>
-                          </a:solidFill>
-                          <a:latin typeface="Cambria Math" panose="02040503050406030204" pitchFamily="18" charset="0"/>
-                        </a:rPr>
-                        <m:t>⁡</m:t>
-                      </m:r>
-                      <m:d>
-                        <m:dPr>
-                          <m:ctrlPr>
-                            <a:rPr lang="ar-AE" sz="2400" i="1">
-                              <a:solidFill>
-                                <a:schemeClr val="accent6">
-                                  <a:lumMod val="60000"/>
-                                  <a:lumOff val="40000"/>
-                                </a:schemeClr>
-                              </a:solidFill>
-                              <a:latin typeface="Cambria Math" panose="02040503050406030204" pitchFamily="18" charset="0"/>
-                            </a:rPr>
-                          </m:ctrlPr>
-                        </m:dPr>
-                        <m:e>
-                          <m:sSub>
-                            <m:sSubPr>
-                              <m:ctrlPr>
-                                <a:rPr lang="ar-AE" sz="2400" i="1">
-                                  <a:solidFill>
-                                    <a:schemeClr val="accent6">
-                                      <a:lumMod val="60000"/>
-                                      <a:lumOff val="40000"/>
-                                    </a:schemeClr>
-                                  </a:solidFill>
-                                  <a:latin typeface="Cambria Math" panose="02040503050406030204" pitchFamily="18" charset="0"/>
-                                </a:rPr>
-                              </m:ctrlPr>
-                            </m:sSubPr>
-                            <m:e>
-                              <m:r>
-                                <a:rPr lang="ar-AE" sz="2400" i="1">
-                                  <a:solidFill>
-                                    <a:schemeClr val="accent6">
-                                      <a:lumMod val="60000"/>
-                                      <a:lumOff val="40000"/>
-                                    </a:schemeClr>
-                                  </a:solidFill>
-                                  <a:latin typeface="Cambria Math" panose="02040503050406030204" pitchFamily="18" charset="0"/>
-                                </a:rPr>
-                                <m:t>𝐶</m:t>
-                              </m:r>
-                            </m:e>
-                            <m:sub>
-                              <m:r>
-                                <a:rPr lang="ar-AE" sz="2400" i="1">
-                                  <a:solidFill>
-                                    <a:schemeClr val="accent6">
-                                      <a:lumMod val="60000"/>
-                                      <a:lumOff val="40000"/>
-                                    </a:schemeClr>
-                                  </a:solidFill>
-                                  <a:latin typeface="Cambria Math" panose="02040503050406030204" pitchFamily="18" charset="0"/>
-                                </a:rPr>
-                                <m:t>𝑡</m:t>
-                              </m:r>
-                            </m:sub>
-                          </m:sSub>
-                        </m:e>
-                      </m:d>
-                    </m:oMath>
-                  </m:oMathPara>
-                </a14:m>
+                <a:r>
+                  <a:rPr lang="en-US" sz="2400" b="1" dirty="0">
+                    <a:solidFill>
+                      <a:schemeClr val="accent6">
+                        <a:lumMod val="60000"/>
+                        <a:lumOff val="40000"/>
+                      </a:schemeClr>
+                    </a:solidFill>
+                  </a:rPr>
+                  <a:t>                         </a:t>
+                </a:r>
+                <a:r>
+                  <a:rPr lang="en-US" sz="2400" dirty="0">
+                    <a:solidFill>
+                      <a:schemeClr val="accent6">
+                        <a:lumMod val="60000"/>
+                        <a:lumOff val="40000"/>
+                      </a:schemeClr>
+                    </a:solidFill>
+                  </a:rPr>
+                  <a:t>-&gt; output gate equation</a:t>
+                </a:r>
                 <a:endParaRPr lang="ar-AE" sz="2400" dirty="0">
                   <a:solidFill>
                     <a:schemeClr val="accent6">
@@ -7730,7 +8099,7 @@
             </p:txBody>
           </p:sp>
         </mc:Choice>
-        <mc:Fallback xmlns="">
+        <mc:Fallback>
           <p:sp>
             <p:nvSpPr>
               <p:cNvPr id="3" name="TextBox 2">
@@ -7747,8 +8116,8 @@
             </p:nvSpPr>
             <p:spPr>
               <a:xfrm>
-                <a:off x="2176272" y="4004361"/>
-                <a:ext cx="7027164" cy="1995033"/>
+                <a:off x="1764792" y="3519729"/>
+                <a:ext cx="8165592" cy="2785314"/>
               </a:xfrm>
               <a:prstGeom prst="rect">
                 <a:avLst/>
@@ -7756,7 +8125,7 @@
               <a:blipFill>
                 <a:blip r:embed="rId3"/>
                 <a:stretch>
-                  <a:fillRect l="-1301" t="-2446"/>
+                  <a:fillRect l="-1195" t="-1751" b="-2407"/>
                 </a:stretch>
               </a:blipFill>
             </p:spPr>

--- a/deep_learning/3_RNN_NLP/3_LSTM_GRU/1_RNNdisadvantages_and_LSTM_need.pptx
+++ b/deep_learning/3_RNN_NLP/3_LSTM_GRU/1_RNNdisadvantages_and_LSTM_need.pptx
@@ -225,7 +225,7 @@
           <a:p>
             <a:fld id="{7BAEECA8-D063-486F-AE31-5020270C1449}" type="datetimeFigureOut">
               <a:rPr lang="en-US" smtClean="0"/>
-              <a:t>5/5/2026</a:t>
+              <a:t>5/9/2026</a:t>
             </a:fld>
             <a:endParaRPr lang="en-US"/>
           </a:p>
@@ -402,7 +402,7 @@
           <a:p>
             <a:fld id="{CB233BD1-3BA8-448D-9D08-7846095EA517}" type="datetimeFigureOut">
               <a:rPr lang="en-US" smtClean="0"/>
-              <a:t>5/5/2026</a:t>
+              <a:t>5/9/2026</a:t>
             </a:fld>
             <a:endParaRPr lang="en-US"/>
           </a:p>
@@ -1008,7 +1008,7 @@
           <a:p>
             <a:fld id="{6383FAE1-13DE-4511-8C1B-C8AFB720664C}" type="datetimeFigureOut">
               <a:rPr lang="en-US" smtClean="0"/>
-              <a:t>5/5/2026</a:t>
+              <a:t>5/9/2026</a:t>
             </a:fld>
             <a:endParaRPr lang="en-US"/>
           </a:p>
@@ -1206,7 +1206,7 @@
           <a:p>
             <a:fld id="{6383FAE1-13DE-4511-8C1B-C8AFB720664C}" type="datetimeFigureOut">
               <a:rPr lang="en-US" smtClean="0"/>
-              <a:t>5/5/2026</a:t>
+              <a:t>5/9/2026</a:t>
             </a:fld>
             <a:endParaRPr lang="en-US"/>
           </a:p>
@@ -1414,7 +1414,7 @@
           <a:p>
             <a:fld id="{6383FAE1-13DE-4511-8C1B-C8AFB720664C}" type="datetimeFigureOut">
               <a:rPr lang="en-US" smtClean="0"/>
-              <a:t>5/5/2026</a:t>
+              <a:t>5/9/2026</a:t>
             </a:fld>
             <a:endParaRPr lang="en-US"/>
           </a:p>
@@ -1612,7 +1612,7 @@
           <a:p>
             <a:fld id="{6383FAE1-13DE-4511-8C1B-C8AFB720664C}" type="datetimeFigureOut">
               <a:rPr lang="en-US" smtClean="0"/>
-              <a:t>5/5/2026</a:t>
+              <a:t>5/9/2026</a:t>
             </a:fld>
             <a:endParaRPr lang="en-US"/>
           </a:p>
@@ -1887,7 +1887,7 @@
           <a:p>
             <a:fld id="{6383FAE1-13DE-4511-8C1B-C8AFB720664C}" type="datetimeFigureOut">
               <a:rPr lang="en-US" smtClean="0"/>
-              <a:t>5/5/2026</a:t>
+              <a:t>5/9/2026</a:t>
             </a:fld>
             <a:endParaRPr lang="en-US"/>
           </a:p>
@@ -2152,7 +2152,7 @@
           <a:p>
             <a:fld id="{6383FAE1-13DE-4511-8C1B-C8AFB720664C}" type="datetimeFigureOut">
               <a:rPr lang="en-US" smtClean="0"/>
-              <a:t>5/5/2026</a:t>
+              <a:t>5/9/2026</a:t>
             </a:fld>
             <a:endParaRPr lang="en-US"/>
           </a:p>
@@ -2564,7 +2564,7 @@
           <a:p>
             <a:fld id="{6383FAE1-13DE-4511-8C1B-C8AFB720664C}" type="datetimeFigureOut">
               <a:rPr lang="en-US" smtClean="0"/>
-              <a:t>5/5/2026</a:t>
+              <a:t>5/9/2026</a:t>
             </a:fld>
             <a:endParaRPr lang="en-US"/>
           </a:p>
@@ -2705,7 +2705,7 @@
           <a:p>
             <a:fld id="{6383FAE1-13DE-4511-8C1B-C8AFB720664C}" type="datetimeFigureOut">
               <a:rPr lang="en-US" smtClean="0"/>
-              <a:t>5/5/2026</a:t>
+              <a:t>5/9/2026</a:t>
             </a:fld>
             <a:endParaRPr lang="en-US"/>
           </a:p>
@@ -2818,7 +2818,7 @@
           <a:p>
             <a:fld id="{6383FAE1-13DE-4511-8C1B-C8AFB720664C}" type="datetimeFigureOut">
               <a:rPr lang="en-US" smtClean="0"/>
-              <a:t>5/5/2026</a:t>
+              <a:t>5/9/2026</a:t>
             </a:fld>
             <a:endParaRPr lang="en-US"/>
           </a:p>
@@ -3129,7 +3129,7 @@
           <a:p>
             <a:fld id="{6383FAE1-13DE-4511-8C1B-C8AFB720664C}" type="datetimeFigureOut">
               <a:rPr lang="en-US" smtClean="0"/>
-              <a:t>5/5/2026</a:t>
+              <a:t>5/9/2026</a:t>
             </a:fld>
             <a:endParaRPr lang="en-US"/>
           </a:p>
@@ -3420,7 +3420,7 @@
           <a:p>
             <a:fld id="{6383FAE1-13DE-4511-8C1B-C8AFB720664C}" type="datetimeFigureOut">
               <a:rPr lang="en-US" smtClean="0"/>
-              <a:t>5/5/2026</a:t>
+              <a:t>5/9/2026</a:t>
             </a:fld>
             <a:endParaRPr lang="en-US"/>
           </a:p>
@@ -3664,7 +3664,7 @@
           <a:p>
             <a:fld id="{6383FAE1-13DE-4511-8C1B-C8AFB720664C}" type="datetimeFigureOut">
               <a:rPr lang="en-US" smtClean="0"/>
-              <a:t>5/5/2026</a:t>
+              <a:t>5/9/2026</a:t>
             </a:fld>
             <a:endParaRPr lang="en-US"/>
           </a:p>
@@ -4722,8 +4722,8 @@
           </a:p>
         </p:txBody>
       </p:sp>
-      <mc:AlternateContent xmlns:mc="http://schemas.openxmlformats.org/markup-compatibility/2006">
-        <mc:Choice xmlns:a14="http://schemas.microsoft.com/office/drawing/2010/main" Requires="a14">
+      <mc:AlternateContent xmlns:mc="http://schemas.openxmlformats.org/markup-compatibility/2006" xmlns:a14="http://schemas.microsoft.com/office/drawing/2010/main">
+        <mc:Choice Requires="a14">
           <p:sp>
             <p:nvSpPr>
               <p:cNvPr id="7" name="TextBox 6">
@@ -5111,7 +5111,7 @@
             </p:txBody>
           </p:sp>
         </mc:Choice>
-        <mc:Fallback>
+        <mc:Fallback xmlns="">
           <p:sp>
             <p:nvSpPr>
               <p:cNvPr id="7" name="TextBox 6">
@@ -5208,8 +5208,8 @@
         </p:blipFill>
         <p:spPr>
           <a:xfrm>
-            <a:off x="5366935" y="4956048"/>
-            <a:ext cx="2935535" cy="1758130"/>
+            <a:off x="5019463" y="4171273"/>
+            <a:ext cx="4005665" cy="2399045"/>
           </a:xfrm>
           <a:prstGeom prst="rect">
             <a:avLst/>
@@ -5230,8 +5230,8 @@
         </p:nvSpPr>
         <p:spPr>
           <a:xfrm>
-            <a:off x="219456" y="290126"/>
-            <a:ext cx="11658600" cy="6001643"/>
+            <a:off x="82296" y="82296"/>
+            <a:ext cx="11658600" cy="4524315"/>
           </a:xfrm>
           <a:prstGeom prst="rect">
             <a:avLst/>
@@ -5345,23 +5345,6 @@
             </a:r>
           </a:p>
           <a:p>
-            <a:pPr marL="514350" indent="-514350">
-              <a:buFont typeface="+mj-lt"/>
-              <a:buAutoNum type="arabicPeriod"/>
-            </a:pPr>
-            <a:r>
-              <a:rPr lang="en-US" sz="2400" dirty="0">
-                <a:solidFill>
-                  <a:schemeClr val="accent6">
-                    <a:lumMod val="60000"/>
-                    <a:lumOff val="40000"/>
-                  </a:schemeClr>
-                </a:solidFill>
-              </a:rPr>
-              <a:t>Backpropagation plays the key role because it is the process that moves error signals backward, causing the repeated shrinking that leads to this problem.</a:t>
-            </a:r>
-          </a:p>
-          <a:p>
             <a:pPr marL="0" indent="0">
               <a:buNone/>
             </a:pPr>
@@ -5388,12 +5371,41 @@
               <a:t>.</a:t>
             </a:r>
           </a:p>
+        </p:txBody>
+      </p:sp>
+      <p:sp>
+        <p:nvSpPr>
+          <p:cNvPr id="3" name="TextBox 2">
+            <a:extLst>
+              <a:ext uri="{FF2B5EF4-FFF2-40B4-BE49-F238E27FC236}">
+                <a16:creationId xmlns:a16="http://schemas.microsoft.com/office/drawing/2014/main" id="{70A74CE0-3724-96F8-D6B4-C9DBB8FFDCE5}"/>
+              </a:ext>
+            </a:extLst>
+          </p:cNvPr>
+          <p:cNvSpPr txBox="1"/>
+          <p:nvPr/>
+        </p:nvSpPr>
+        <p:spPr>
+          <a:xfrm>
+            <a:off x="0" y="6488668"/>
+            <a:ext cx="9468612" cy="369332"/>
+          </a:xfrm>
+          <a:prstGeom prst="rect">
+            <a:avLst/>
+          </a:prstGeom>
+          <a:noFill/>
+        </p:spPr>
+        <p:txBody>
+          <a:bodyPr wrap="square">
+            <a:spAutoFit/>
+          </a:bodyPr>
+          <a:lstStyle/>
           <a:p>
             <a:pPr marL="0" indent="0">
               <a:buNone/>
             </a:pPr>
             <a:r>
-              <a:rPr lang="en-US" sz="2400" b="1" dirty="0">
+              <a:rPr lang="en-US" sz="1800" b="1" dirty="0">
                 <a:solidFill>
                   <a:schemeClr val="accent6">
                     <a:lumMod val="60000"/>
@@ -5404,7 +5416,7 @@
               <a:t>Read </a:t>
             </a:r>
             <a:r>
-              <a:rPr lang="en-US" sz="2400" dirty="0">
+              <a:rPr lang="en-US" sz="1800" dirty="0">
                 <a:solidFill>
                   <a:schemeClr val="accent6">
                     <a:lumMod val="60000"/>
@@ -5730,7 +5742,7 @@
         <p:spPr>
           <a:xfrm>
             <a:off x="256032" y="492299"/>
-            <a:ext cx="11512296" cy="6081152"/>
+            <a:ext cx="11512296" cy="3944670"/>
           </a:xfrm>
           <a:prstGeom prst="rect">
             <a:avLst/>
@@ -5753,6 +5765,30 @@
               <a:buNone/>
             </a:pPr>
             <a:r>
+              <a:rPr lang="en-US" sz="2400" b="1" i="0" dirty="0">
+                <a:solidFill>
+                  <a:schemeClr val="accent6">
+                    <a:lumMod val="60000"/>
+                    <a:lumOff val="40000"/>
+                  </a:schemeClr>
+                </a:solidFill>
+                <a:effectLst/>
+                <a:latin typeface="Inter"/>
+              </a:rPr>
+              <a:t>3. Computationally slower than other neural network architectures. </a:t>
+            </a:r>
+          </a:p>
+          <a:p>
+            <a:pPr marL="0" indent="0" algn="l">
+              <a:lnSpc>
+                <a:spcPts val="2700"/>
+              </a:lnSpc>
+              <a:spcAft>
+                <a:spcPts val="750"/>
+              </a:spcAft>
+              <a:buNone/>
+            </a:pPr>
+            <a:r>
               <a:rPr lang="en-US" sz="2400" b="0" i="0" dirty="0">
                 <a:solidFill>
                   <a:schemeClr val="accent6">
@@ -5763,7 +5799,7 @@
                 <a:effectLst/>
                 <a:latin typeface="Inter"/>
               </a:rPr>
-              <a:t>3. Computationally slower than other neural network architectures. The reason</a:t>
+              <a:t>The reason</a:t>
             </a:r>
             <a:r>
               <a:rPr lang="en-US" sz="2400" dirty="0">
@@ -5907,108 +5943,6 @@
                 </a:solidFill>
               </a:rPr>
               <a:t>➔ This makes training longer and memory-intensive compared to a simple backward pass in a feedforward network.</a:t>
-            </a:r>
-          </a:p>
-          <a:p>
-            <a:pPr marL="0" indent="0">
-              <a:buNone/>
-            </a:pPr>
-            <a:endParaRPr lang="en-US" sz="2400" dirty="0">
-              <a:solidFill>
-                <a:schemeClr val="accent6">
-                  <a:lumMod val="60000"/>
-                  <a:lumOff val="40000"/>
-                </a:schemeClr>
-              </a:solidFill>
-            </a:endParaRPr>
-          </a:p>
-          <a:p>
-            <a:pPr marL="0" indent="0">
-              <a:buNone/>
-            </a:pPr>
-            <a:r>
-              <a:rPr lang="en-US" sz="2400" dirty="0">
-                <a:solidFill>
-                  <a:schemeClr val="accent6">
-                    <a:lumMod val="60000"/>
-                    <a:lumOff val="40000"/>
-                  </a:schemeClr>
-                </a:solidFill>
-              </a:rPr>
-              <a:t>c) </a:t>
-            </a:r>
-            <a:r>
-              <a:rPr lang="en-US" sz="2400" b="1" dirty="0">
-                <a:solidFill>
-                  <a:schemeClr val="accent6">
-                    <a:lumMod val="60000"/>
-                    <a:lumOff val="40000"/>
-                  </a:schemeClr>
-                </a:solidFill>
-              </a:rPr>
-              <a:t>Long Sequences</a:t>
-            </a:r>
-            <a:r>
-              <a:rPr lang="en-US" sz="2400" dirty="0">
-                <a:solidFill>
-                  <a:schemeClr val="accent6">
-                    <a:lumMod val="60000"/>
-                    <a:lumOff val="40000"/>
-                  </a:schemeClr>
-                </a:solidFill>
-              </a:rPr>
-              <a:t>: If the sequence is long (e.g., 1000 words), the model must do 1000 sequential calculations instead of processing all words at once like a CNN or Transformer could.</a:t>
-            </a:r>
-          </a:p>
-          <a:p>
-            <a:pPr marL="0" indent="0">
-              <a:buNone/>
-            </a:pPr>
-            <a:endParaRPr lang="en-US" sz="2400" dirty="0">
-              <a:solidFill>
-                <a:schemeClr val="accent6">
-                  <a:lumMod val="60000"/>
-                  <a:lumOff val="40000"/>
-                </a:schemeClr>
-              </a:solidFill>
-            </a:endParaRPr>
-          </a:p>
-          <a:p>
-            <a:pPr marL="0" indent="0">
-              <a:buNone/>
-            </a:pPr>
-            <a:r>
-              <a:rPr lang="en-US" sz="2400" dirty="0">
-                <a:solidFill>
-                  <a:schemeClr val="accent6">
-                    <a:lumMod val="60000"/>
-                    <a:lumOff val="40000"/>
-                  </a:schemeClr>
-                </a:solidFill>
-              </a:rPr>
-              <a:t>d) </a:t>
-            </a:r>
-            <a:r>
-              <a:rPr lang="en-US" sz="2400" b="1" dirty="0">
-                <a:solidFill>
-                  <a:schemeClr val="accent6">
-                    <a:lumMod val="60000"/>
-                    <a:lumOff val="40000"/>
-                  </a:schemeClr>
-                </a:solidFill>
-              </a:rPr>
-              <a:t>Gradient Issues</a:t>
-            </a:r>
-            <a:r>
-              <a:rPr lang="en-US" sz="2400" dirty="0">
-                <a:solidFill>
-                  <a:schemeClr val="accent6">
-                    <a:lumMod val="60000"/>
-                    <a:lumOff val="40000"/>
-                  </a:schemeClr>
-                </a:solidFill>
-              </a:rPr>
-              <a:t>: Due to vanishing or exploding gradients, RNNs often need smaller learning rates, gradient clipping, or careful initialization, slowing down training further.</a:t>
             </a:r>
           </a:p>
         </p:txBody>
@@ -6109,7 +6043,7 @@
         <p:spPr>
           <a:xfrm>
             <a:off x="192024" y="1013507"/>
-            <a:ext cx="11512296" cy="830997"/>
+            <a:ext cx="11512296" cy="2677656"/>
           </a:xfrm>
           <a:prstGeom prst="rect">
             <a:avLst/>
@@ -6131,10 +6065,37 @@
                   </a:schemeClr>
                 </a:solidFill>
               </a:rPr>
-              <a:t>RNN is slower because it is sequential and depends on past computations, </a:t>
-            </a:r>
-          </a:p>
-          <a:p>
+              <a:t>Summary:</a:t>
+            </a:r>
+          </a:p>
+          <a:p>
+            <a:endParaRPr lang="en-US" sz="2400" b="1" dirty="0">
+              <a:solidFill>
+                <a:schemeClr val="accent6">
+                  <a:lumMod val="60000"/>
+                  <a:lumOff val="40000"/>
+                </a:schemeClr>
+              </a:solidFill>
+            </a:endParaRPr>
+          </a:p>
+          <a:p>
+            <a:r>
+              <a:rPr lang="en-US" sz="2400" dirty="0">
+                <a:solidFill>
+                  <a:schemeClr val="accent6">
+                    <a:lumMod val="60000"/>
+                    <a:lumOff val="40000"/>
+                  </a:schemeClr>
+                </a:solidFill>
+              </a:rPr>
+              <a:t>RNN is slower because it is </a:t>
+            </a:r>
+          </a:p>
+          <a:p>
+            <a:pPr marL="342900" indent="-342900">
+              <a:buFont typeface="Arial" panose="020B0604020202020204" pitchFamily="34" charset="0"/>
+              <a:buChar char="•"/>
+            </a:pPr>
             <a:r>
               <a:rPr lang="en-US" sz="2400" b="1" dirty="0">
                 <a:solidFill>
@@ -6144,9 +6105,75 @@
                   </a:schemeClr>
                 </a:solidFill>
               </a:rPr>
+              <a:t>sequential</a:t>
+            </a:r>
+            <a:r>
+              <a:rPr lang="en-US" sz="2400" dirty="0">
+                <a:solidFill>
+                  <a:schemeClr val="accent6">
+                    <a:lumMod val="60000"/>
+                    <a:lumOff val="40000"/>
+                  </a:schemeClr>
+                </a:solidFill>
+              </a:rPr>
+              <a:t> and </a:t>
+            </a:r>
+          </a:p>
+          <a:p>
+            <a:pPr marL="342900" indent="-342900">
+              <a:buFont typeface="Arial" panose="020B0604020202020204" pitchFamily="34" charset="0"/>
+              <a:buChar char="•"/>
+            </a:pPr>
+            <a:r>
+              <a:rPr lang="en-US" sz="2400" b="1" dirty="0">
+                <a:solidFill>
+                  <a:schemeClr val="accent6">
+                    <a:lumMod val="60000"/>
+                    <a:lumOff val="40000"/>
+                  </a:schemeClr>
+                </a:solidFill>
+              </a:rPr>
+              <a:t>depends on past computations</a:t>
+            </a:r>
+            <a:r>
+              <a:rPr lang="en-US" sz="2400" dirty="0">
+                <a:solidFill>
+                  <a:schemeClr val="accent6">
+                    <a:lumMod val="60000"/>
+                    <a:lumOff val="40000"/>
+                  </a:schemeClr>
+                </a:solidFill>
+              </a:rPr>
+              <a:t>, </a:t>
+            </a:r>
+          </a:p>
+          <a:p>
+            <a:pPr marL="342900" indent="-342900">
+              <a:buFont typeface="Arial" panose="020B0604020202020204" pitchFamily="34" charset="0"/>
+              <a:buChar char="•"/>
+            </a:pPr>
+            <a:endParaRPr lang="en-US" sz="2400" dirty="0">
+              <a:solidFill>
+                <a:schemeClr val="accent6">
+                  <a:lumMod val="60000"/>
+                  <a:lumOff val="40000"/>
+                </a:schemeClr>
+              </a:solidFill>
+            </a:endParaRPr>
+          </a:p>
+          <a:p>
+            <a:r>
+              <a:rPr lang="en-US" sz="2400" dirty="0">
+                <a:solidFill>
+                  <a:schemeClr val="accent6">
+                    <a:lumMod val="60000"/>
+                    <a:lumOff val="40000"/>
+                  </a:schemeClr>
+                </a:solidFill>
+              </a:rPr>
               <a:t>while normal feedforward networks (like CNNs or MLPs) can work on all parts in parallel.</a:t>
             </a:r>
-            <a:endParaRPr lang="en-IN" sz="2400" b="1" dirty="0">
+            <a:endParaRPr lang="en-IN" sz="2400" dirty="0">
               <a:solidFill>
                 <a:schemeClr val="accent6">
                   <a:lumMod val="60000"/>
@@ -6196,7 +6223,7 @@
         <p:spPr>
           <a:xfrm>
             <a:off x="118872" y="744570"/>
-            <a:ext cx="11658599" cy="2246769"/>
+            <a:ext cx="11658599" cy="1200329"/>
           </a:xfrm>
           <a:prstGeom prst="rect">
             <a:avLst/>
@@ -6210,7 +6237,7 @@
           <a:lstStyle/>
           <a:p>
             <a:r>
-              <a:rPr lang="en-US" sz="2800" dirty="0">
+              <a:rPr lang="en-US" sz="2400" dirty="0">
                 <a:solidFill>
                   <a:schemeClr val="accent6">
                     <a:lumMod val="60000"/>
@@ -6221,7 +6248,7 @@
               <a:t>That's why </a:t>
             </a:r>
             <a:r>
-              <a:rPr lang="en-US" sz="2800" b="1" dirty="0">
+              <a:rPr lang="en-US" sz="2400" b="1" dirty="0">
                 <a:solidFill>
                   <a:schemeClr val="accent6">
                     <a:lumMod val="60000"/>
@@ -6232,7 +6259,7 @@
               <a:t>LSTM</a:t>
             </a:r>
             <a:r>
-              <a:rPr lang="en-US" sz="2800" dirty="0">
+              <a:rPr lang="en-US" sz="2400" dirty="0">
                 <a:solidFill>
                   <a:schemeClr val="accent6">
                     <a:lumMod val="60000"/>
@@ -6243,7 +6270,7 @@
               <a:t> (Long Short-Term Memory) and </a:t>
             </a:r>
             <a:r>
-              <a:rPr lang="en-US" sz="2800" b="1" dirty="0">
+              <a:rPr lang="en-US" sz="2400" b="1" dirty="0">
                 <a:solidFill>
                   <a:schemeClr val="accent6">
                     <a:lumMod val="60000"/>
@@ -6254,7 +6281,7 @@
               <a:t>GRU</a:t>
             </a:r>
             <a:r>
-              <a:rPr lang="en-US" sz="2800" dirty="0">
+              <a:rPr lang="en-US" sz="2400" dirty="0">
                 <a:solidFill>
                   <a:schemeClr val="accent6">
                     <a:lumMod val="60000"/>
@@ -6266,7 +6293,7 @@
             </a:r>
           </a:p>
           <a:p>
-            <a:endParaRPr lang="en-US" sz="2800" dirty="0">
+            <a:endParaRPr lang="en-US" sz="2400" dirty="0">
               <a:solidFill>
                 <a:schemeClr val="accent6">
                   <a:lumMod val="60000"/>
@@ -6277,7 +6304,7 @@
           </a:p>
           <a:p>
             <a:r>
-              <a:rPr lang="en-US" sz="2800" dirty="0">
+              <a:rPr lang="en-US" sz="2400" dirty="0">
                 <a:solidFill>
                   <a:schemeClr val="accent6">
                     <a:lumMod val="60000"/>
@@ -6288,7 +6315,7 @@
               <a:t>They are </a:t>
             </a:r>
             <a:r>
-              <a:rPr lang="en-US" sz="2800" i="1" dirty="0">
+              <a:rPr lang="en-US" sz="2400" i="1" dirty="0">
                 <a:solidFill>
                   <a:schemeClr val="accent6">
                     <a:lumMod val="60000"/>
@@ -6299,7 +6326,7 @@
               <a:t>special types of RNNs</a:t>
             </a:r>
             <a:r>
-              <a:rPr lang="en-US" sz="2800" dirty="0">
+              <a:rPr lang="en-US" sz="2400" dirty="0">
                 <a:solidFill>
                   <a:schemeClr val="accent6">
                     <a:lumMod val="60000"/>
@@ -6310,7 +6337,7 @@
               <a:t> that can </a:t>
             </a:r>
             <a:r>
-              <a:rPr lang="en-US" sz="2800" b="1" dirty="0">
+              <a:rPr lang="en-US" sz="2400" b="1" dirty="0">
                 <a:solidFill>
                   <a:schemeClr val="accent6">
                     <a:lumMod val="60000"/>
@@ -6321,7 +6348,7 @@
               <a:t>carry long-term information</a:t>
             </a:r>
             <a:r>
-              <a:rPr lang="en-US" sz="2800" dirty="0">
+              <a:rPr lang="en-US" sz="2400" dirty="0">
                 <a:solidFill>
                   <a:schemeClr val="accent6">
                     <a:lumMod val="60000"/>
@@ -6331,16 +6358,6 @@
               </a:rPr>
               <a:t> much better.</a:t>
             </a:r>
-          </a:p>
-          <a:p>
-            <a:endParaRPr lang="en-US" sz="2800" dirty="0">
-              <a:solidFill>
-                <a:schemeClr val="accent6">
-                  <a:lumMod val="60000"/>
-                  <a:lumOff val="40000"/>
-                </a:schemeClr>
-              </a:solidFill>
-            </a:endParaRPr>
           </a:p>
         </p:txBody>
       </p:sp>
@@ -6689,8 +6706,8 @@
           </a:p>
         </p:txBody>
       </p:sp>
-      <mc:AlternateContent xmlns:mc="http://schemas.openxmlformats.org/markup-compatibility/2006">
-        <mc:Choice xmlns:a14="http://schemas.microsoft.com/office/drawing/2010/main" Requires="a14">
+      <mc:AlternateContent xmlns:mc="http://schemas.openxmlformats.org/markup-compatibility/2006" xmlns:a14="http://schemas.microsoft.com/office/drawing/2010/main">
+        <mc:Choice Requires="a14">
           <p:sp>
             <p:nvSpPr>
               <p:cNvPr id="3" name="TextBox 2">
@@ -8099,7 +8116,7 @@
             </p:txBody>
           </p:sp>
         </mc:Choice>
-        <mc:Fallback>
+        <mc:Fallback xmlns="">
           <p:sp>
             <p:nvSpPr>
               <p:cNvPr id="3" name="TextBox 2">
